--- a/courses/build/teach-the-teachers/T-D2.pptx
+++ b/courses/build/teach-the-teachers/T-D2.pptx
@@ -4807,7 +4807,7 @@
     <p:bg>
       <p:bgPr>
         <a:solidFill>
-          <a:srgbClr val="1F4D2B"/>
+          <a:srgbClr val="2F3A33"/>
         </a:solidFill>
         <a:effectLst/>
       </p:bgPr>
@@ -4849,9 +4849,9 @@
             <a:r>
               <a:rPr sz="1000" b="0">
                 <a:solidFill>
-                  <a:srgbClr val="A8D88A"/>
-                </a:solidFill>
-                <a:latin typeface="Arial"/>
+                  <a:srgbClr val="F2EFE6"/>
+                </a:solidFill>
+                <a:latin typeface="Trebuchet MS"/>
               </a:rPr>
               <a:t>T-D2-01   ·   Poster T-P01</a:t>
             </a:r>
@@ -4888,9 +4888,9 @@
             <a:r>
               <a:rPr sz="1000" b="0">
                 <a:solidFill>
-                  <a:srgbClr val="A8D88A"/>
-                </a:solidFill>
-                <a:latin typeface="Arial"/>
+                  <a:srgbClr val="F2EFE6"/>
+                </a:solidFill>
+                <a:latin typeface="Trebuchet MS"/>
               </a:rPr>
               <a:t>Teach the Teachers</a:t>
             </a:r>
@@ -4927,9 +4927,9 @@
             <a:r>
               <a:rPr sz="4800" b="1">
                 <a:solidFill>
-                  <a:srgbClr val="F7F2E9"/>
-                </a:solidFill>
-                <a:latin typeface="Georgia"/>
+                  <a:srgbClr val="F2EFE6"/>
+                </a:solidFill>
+                <a:latin typeface="Segoe Print"/>
               </a:rPr>
               <a:t>Day 2</a:t>
             </a:r>
@@ -4951,7 +4951,7 @@
             <a:avLst/>
           </a:prstGeom>
           <a:solidFill>
-            <a:srgbClr val="C07A1E"/>
+            <a:srgbClr val="D2452C"/>
           </a:solidFill>
           <a:ln>
             <a:noFill/>
@@ -5010,9 +5010,9 @@
             <a:r>
               <a:rPr sz="2400" b="0">
                 <a:solidFill>
-                  <a:srgbClr val="A8D88A"/>
-                </a:solidFill>
-                <a:latin typeface="Arial"/>
+                  <a:srgbClr val="F2EFE6"/>
+                </a:solidFill>
+                <a:latin typeface="Trebuchet MS"/>
               </a:rPr>
               <a:t>Say less, ask more</a:t>
             </a:r>
@@ -5026,9 +5026,9 @@
             <a:r>
               <a:rPr sz="2400" b="0">
                 <a:solidFill>
-                  <a:srgbClr val="A8D88A"/>
-                </a:solidFill>
-                <a:latin typeface="Arial"/>
+                  <a:srgbClr val="F2EFE6"/>
+                </a:solidFill>
+                <a:latin typeface="Trebuchet MS"/>
               </a:rPr>
               <a:t>Day 2 of 5</a:t>
             </a:r>
@@ -5050,11 +5050,11 @@
             <a:avLst/>
           </a:prstGeom>
           <a:solidFill>
-            <a:srgbClr val="FBF6EC"/>
+            <a:srgbClr val="C9A77C"/>
           </a:solidFill>
           <a:ln w="15875">
             <a:solidFill>
-              <a:srgbClr val="E2D8C4"/>
+              <a:srgbClr val="2C6FB7"/>
             </a:solidFill>
           </a:ln>
           <a:effectLst/>
@@ -5111,9 +5111,9 @@
             <a:r>
               <a:rPr sz="1200" b="1">
                 <a:solidFill>
-                  <a:srgbClr val="C07A1E"/>
-                </a:solidFill>
-                <a:latin typeface="Arial"/>
+                  <a:srgbClr val="D2452C"/>
+                </a:solidFill>
+                <a:latin typeface="Trebuchet MS"/>
               </a:rPr>
               <a:t>IMAGE · T-IMG-08 · coming</a:t>
             </a:r>
@@ -5150,9 +5150,9 @@
             <a:r>
               <a:rPr sz="1800" b="1">
                 <a:solidFill>
-                  <a:srgbClr val="1F4D2B"/>
-                </a:solidFill>
-                <a:latin typeface="Georgia"/>
+                  <a:srgbClr val="1C1C1C"/>
+                </a:solidFill>
+                <a:latin typeface="Segoe Print"/>
               </a:rPr>
               <a:t>Tree talk</a:t>
             </a:r>
@@ -5189,9 +5189,9 @@
             <a:r>
               <a:rPr sz="1100" b="0">
                 <a:solidFill>
-                  <a:srgbClr val="20190F"/>
-                </a:solidFill>
-                <a:latin typeface="Arial"/>
+                  <a:srgbClr val="1C1C1C"/>
+                </a:solidFill>
+                <a:latin typeface="Trebuchet MS"/>
               </a:rPr>
               <a:t>A teaching circle under a big shade tree: a poster tied to the trunk at seated eye level; about twelve learners in a horseshoe on chairs and a log, faces in shade, the sun behind them in the upper part of the scene (north). The facilitator stands to one side of the poster. On the ground in the middle: two cut-open 2 ℓ bottles and a cardboard house. A…</a:t>
             </a:r>
@@ -5212,7 +5212,7 @@
     <p:bg>
       <p:bgPr>
         <a:solidFill>
-          <a:srgbClr val="F7F2E9"/>
+          <a:srgbClr val="C9A77C"/>
         </a:solidFill>
         <a:effectLst/>
       </p:bgPr>
@@ -5254,9 +5254,9 @@
             <a:r>
               <a:rPr sz="1000" b="0">
                 <a:solidFill>
-                  <a:srgbClr val="6B6255"/>
-                </a:solidFill>
-                <a:latin typeface="Arial"/>
+                  <a:srgbClr val="1C1C1C"/>
+                </a:solidFill>
+                <a:latin typeface="Trebuchet MS"/>
               </a:rPr>
               <a:t>T-D2-10   ·   Poster F-P07</a:t>
             </a:r>
@@ -5293,9 +5293,9 @@
             <a:r>
               <a:rPr sz="1000" b="0">
                 <a:solidFill>
-                  <a:srgbClr val="6B6255"/>
-                </a:solidFill>
-                <a:latin typeface="Arial"/>
+                  <a:srgbClr val="1C1C1C"/>
+                </a:solidFill>
+                <a:latin typeface="Trebuchet MS"/>
               </a:rPr>
               <a:t>Teach the Teachers</a:t>
             </a:r>
@@ -5317,7 +5317,7 @@
             <a:avLst/>
           </a:prstGeom>
           <a:solidFill>
-            <a:srgbClr val="C07A1E"/>
+            <a:srgbClr val="D2452C"/>
           </a:solidFill>
           <a:ln>
             <a:noFill/>
@@ -5376,9 +5376,9 @@
             <a:r>
               <a:rPr sz="1400" b="1">
                 <a:solidFill>
-                  <a:srgbClr val="F7F2E9"/>
-                </a:solidFill>
-                <a:latin typeface="Arial"/>
+                  <a:srgbClr val="C9A77C"/>
+                </a:solidFill>
+                <a:latin typeface="Trebuchet MS"/>
               </a:rPr>
               <a:t>YOUR TURN</a:t>
             </a:r>
@@ -5415,9 +5415,9 @@
             <a:r>
               <a:rPr sz="3800" b="1">
                 <a:solidFill>
-                  <a:srgbClr val="1F4D2B"/>
-                </a:solidFill>
-                <a:latin typeface="Georgia"/>
+                  <a:srgbClr val="1C1C1C"/>
+                </a:solidFill>
+                <a:latin typeface="Segoe Print"/>
               </a:rPr>
               <a:t>Where does the water go?</a:t>
             </a:r>
@@ -5439,7 +5439,7 @@
             <a:avLst/>
           </a:prstGeom>
           <a:solidFill>
-            <a:srgbClr val="E2D8C4"/>
+            <a:srgbClr val="2C6FB7"/>
           </a:solidFill>
           <a:ln>
             <a:noFill/>
@@ -5498,9 +5498,9 @@
             <a:r>
               <a:rPr sz="3000" b="1">
                 <a:solidFill>
-                  <a:srgbClr val="20190F"/>
-                </a:solidFill>
-                <a:latin typeface="Arial"/>
+                  <a:srgbClr val="1C1C1C"/>
+                </a:solidFill>
+                <a:latin typeface="Trebuchet MS"/>
               </a:rPr>
               <a:t>•  Pour 500 ml on each bottle</a:t>
             </a:r>
@@ -5514,9 +5514,9 @@
             <a:r>
               <a:rPr sz="3000" b="1">
                 <a:solidFill>
-                  <a:srgbClr val="20190F"/>
-                </a:solidFill>
-                <a:latin typeface="Arial"/>
+                  <a:srgbClr val="1C1C1C"/>
+                </a:solidFill>
+                <a:latin typeface="Trebuchet MS"/>
               </a:rPr>
               <a:t>•  Catch and measure the runoff</a:t>
             </a:r>
@@ -5530,9 +5530,9 @@
             <a:r>
               <a:rPr sz="3000" b="1">
                 <a:solidFill>
-                  <a:srgbClr val="20190F"/>
-                </a:solidFill>
-                <a:latin typeface="Arial"/>
+                  <a:srgbClr val="1C1C1C"/>
+                </a:solidFill>
+                <a:latin typeface="Trebuchet MS"/>
               </a:rPr>
               <a:t>•  Find three water signs</a:t>
             </a:r>
@@ -5578,7 +5578,7 @@
             <a:avLst/>
           </a:prstGeom>
           <a:solidFill>
-            <a:srgbClr val="20190F"/>
+            <a:srgbClr val="1C1C1C"/>
           </a:solidFill>
           <a:ln>
             <a:noFill/>
@@ -5637,9 +5637,9 @@
             <a:r>
               <a:rPr sz="1100" b="0">
                 <a:solidFill>
-                  <a:srgbClr val="F7F2E9"/>
-                </a:solidFill>
-                <a:latin typeface="Arial"/>
+                  <a:srgbClr val="C9A77C"/>
+                </a:solidFill>
+                <a:latin typeface="Trebuchet MS"/>
               </a:rPr>
               <a:t>▶  Clip T-ANI-14 · play from the tablet: watch-05-water-movement.mp4</a:t>
             </a:r>
@@ -5660,7 +5660,7 @@
     <p:bg>
       <p:bgPr>
         <a:solidFill>
-          <a:srgbClr val="F7F2E9"/>
+          <a:srgbClr val="C9A77C"/>
         </a:solidFill>
         <a:effectLst/>
       </p:bgPr>
@@ -5702,9 +5702,9 @@
             <a:r>
               <a:rPr sz="1000" b="0">
                 <a:solidFill>
-                  <a:srgbClr val="6B6255"/>
-                </a:solidFill>
-                <a:latin typeface="Arial"/>
+                  <a:srgbClr val="1C1C1C"/>
+                </a:solidFill>
+                <a:latin typeface="Trebuchet MS"/>
               </a:rPr>
               <a:t>T-D2-11   ·   Poster T-P12</a:t>
             </a:r>
@@ -5741,9 +5741,9 @@
             <a:r>
               <a:rPr sz="1000" b="0">
                 <a:solidFill>
-                  <a:srgbClr val="6B6255"/>
-                </a:solidFill>
-                <a:latin typeface="Arial"/>
+                  <a:srgbClr val="1C1C1C"/>
+                </a:solidFill>
+                <a:latin typeface="Trebuchet MS"/>
               </a:rPr>
               <a:t>Teach the Teachers</a:t>
             </a:r>
@@ -5780,9 +5780,9 @@
             <a:r>
               <a:rPr sz="3800" b="1">
                 <a:solidFill>
-                  <a:srgbClr val="1F4D2B"/>
-                </a:solidFill>
-                <a:latin typeface="Georgia"/>
+                  <a:srgbClr val="1C1C1C"/>
+                </a:solidFill>
+                <a:latin typeface="Segoe Print"/>
               </a:rPr>
               <a:t>Tree talk</a:t>
             </a:r>
@@ -5804,7 +5804,7 @@
             <a:avLst/>
           </a:prstGeom>
           <a:solidFill>
-            <a:srgbClr val="E2D8C4"/>
+            <a:srgbClr val="2C6FB7"/>
           </a:solidFill>
           <a:ln>
             <a:noFill/>
@@ -5863,9 +5863,9 @@
             <a:r>
               <a:rPr sz="2800" b="0">
                 <a:solidFill>
-                  <a:srgbClr val="20190F"/>
-                </a:solidFill>
-                <a:latin typeface="Arial"/>
+                  <a:srgbClr val="1C1C1C"/>
+                </a:solidFill>
+                <a:latin typeface="Trebuchet MS"/>
               </a:rPr>
               <a:t>•  Sun behind learners</a:t>
             </a:r>
@@ -5879,9 +5879,9 @@
             <a:r>
               <a:rPr sz="2800" b="0">
                 <a:solidFill>
-                  <a:srgbClr val="20190F"/>
-                </a:solidFill>
-                <a:latin typeface="Arial"/>
+                  <a:srgbClr val="1C1C1C"/>
+                </a:solidFill>
+                <a:latin typeface="Trebuchet MS"/>
               </a:rPr>
               <a:t>•  Poster at eye level</a:t>
             </a:r>
@@ -5895,9 +5895,9 @@
             <a:r>
               <a:rPr sz="2800" b="0">
                 <a:solidFill>
-                  <a:srgbClr val="20190F"/>
-                </a:solidFill>
-                <a:latin typeface="Arial"/>
+                  <a:srgbClr val="1C1C1C"/>
+                </a:solidFill>
+                <a:latin typeface="Trebuchet MS"/>
               </a:rPr>
               <a:t>•  Stop, then talk</a:t>
             </a:r>
@@ -5919,11 +5919,11 @@
             <a:avLst/>
           </a:prstGeom>
           <a:solidFill>
-            <a:srgbClr val="FBF6EC"/>
+            <a:srgbClr val="C9A77C"/>
           </a:solidFill>
           <a:ln w="15875">
             <a:solidFill>
-              <a:srgbClr val="E2D8C4"/>
+              <a:srgbClr val="2C6FB7"/>
             </a:solidFill>
           </a:ln>
           <a:effectLst/>
@@ -5980,9 +5980,9 @@
             <a:r>
               <a:rPr sz="1200" b="1">
                 <a:solidFill>
-                  <a:srgbClr val="C07A1E"/>
-                </a:solidFill>
-                <a:latin typeface="Arial"/>
+                  <a:srgbClr val="D2452C"/>
+                </a:solidFill>
+                <a:latin typeface="Trebuchet MS"/>
               </a:rPr>
               <a:t>POSTER ART · T-P12-ART · coming</a:t>
             </a:r>
@@ -6019,9 +6019,9 @@
             <a:r>
               <a:rPr sz="1800" b="1">
                 <a:solidFill>
-                  <a:srgbClr val="1F4D2B"/>
-                </a:solidFill>
-                <a:latin typeface="Georgia"/>
+                  <a:srgbClr val="1C1C1C"/>
+                </a:solidFill>
+                <a:latin typeface="Segoe Print"/>
               </a:rPr>
               <a:t>Artwork for T-P12 · Teach with what you have (tree talk)</a:t>
             </a:r>
@@ -6058,9 +6058,9 @@
             <a:r>
               <a:rPr sz="1100" b="0">
                 <a:solidFill>
-                  <a:srgbClr val="20190F"/>
-                </a:solidFill>
-                <a:latin typeface="Arial"/>
+                  <a:srgbClr val="1C1C1C"/>
+                </a:solidFill>
+                <a:latin typeface="Trebuchet MS"/>
               </a:rPr>
               <a:t>A teaching circle under a large shade tree. A poster is tied to the trunk at the eye level of seated people. Learners sit in a horseshoe facing the trunk, the sun shape behind them in the upper part of the scene (north, marked by a small compass arrow pointing up), so their faces are in shade. The facilitator stands to one side of the poster, wind lines…</a:t>
             </a:r>
@@ -6081,7 +6081,7 @@
     <p:bg>
       <p:bgPr>
         <a:solidFill>
-          <a:srgbClr val="1F4D2B"/>
+          <a:srgbClr val="2F3A33"/>
         </a:solidFill>
         <a:effectLst/>
       </p:bgPr>
@@ -6123,9 +6123,9 @@
             <a:r>
               <a:rPr sz="1000" b="0">
                 <a:solidFill>
-                  <a:srgbClr val="A8D88A"/>
-                </a:solidFill>
-                <a:latin typeface="Arial"/>
+                  <a:srgbClr val="F2EFE6"/>
+                </a:solidFill>
+                <a:latin typeface="Trebuchet MS"/>
               </a:rPr>
               <a:t>T-D2-12   ·   Poster T-P13</a:t>
             </a:r>
@@ -6162,9 +6162,9 @@
             <a:r>
               <a:rPr sz="1000" b="0">
                 <a:solidFill>
-                  <a:srgbClr val="A8D88A"/>
-                </a:solidFill>
-                <a:latin typeface="Arial"/>
+                  <a:srgbClr val="F2EFE6"/>
+                </a:solidFill>
+                <a:latin typeface="Trebuchet MS"/>
               </a:rPr>
               <a:t>Teach the Teachers</a:t>
             </a:r>
@@ -6201,9 +6201,9 @@
             <a:r>
               <a:rPr sz="4800" b="1">
                 <a:solidFill>
-                  <a:srgbClr val="F7F2E9"/>
-                </a:solidFill>
-                <a:latin typeface="Georgia"/>
+                  <a:srgbClr val="F2EFE6"/>
+                </a:solidFill>
+                <a:latin typeface="Segoe Print"/>
               </a:rPr>
               <a:t>Mode 1: posters only</a:t>
             </a:r>
@@ -6225,7 +6225,7 @@
             <a:avLst/>
           </a:prstGeom>
           <a:solidFill>
-            <a:srgbClr val="C07A1E"/>
+            <a:srgbClr val="D2452C"/>
           </a:solidFill>
           <a:ln>
             <a:noFill/>
@@ -6284,9 +6284,9 @@
             <a:r>
               <a:rPr sz="2400" b="0">
                 <a:solidFill>
-                  <a:srgbClr val="A8D88A"/>
-                </a:solidFill>
-                <a:latin typeface="Arial"/>
+                  <a:srgbClr val="F2EFE6"/>
+                </a:solidFill>
+                <a:latin typeface="Trebuchet MS"/>
               </a:rPr>
               <a:t>One lesson, three ways</a:t>
             </a:r>
@@ -6300,9 +6300,9 @@
             <a:r>
               <a:rPr sz="2400" b="0">
                 <a:solidFill>
-                  <a:srgbClr val="A8D88A"/>
-                </a:solidFill>
-                <a:latin typeface="Arial"/>
+                  <a:srgbClr val="F2EFE6"/>
+                </a:solidFill>
+                <a:latin typeface="Trebuchet MS"/>
               </a:rPr>
               <a:t>Today: the poster</a:t>
             </a:r>
@@ -6324,11 +6324,11 @@
             <a:avLst/>
           </a:prstGeom>
           <a:solidFill>
-            <a:srgbClr val="FBF6EC"/>
+            <a:srgbClr val="C9A77C"/>
           </a:solidFill>
           <a:ln w="15875">
             <a:solidFill>
-              <a:srgbClr val="E2D8C4"/>
+              <a:srgbClr val="2C6FB7"/>
             </a:solidFill>
           </a:ln>
           <a:effectLst/>
@@ -6385,9 +6385,9 @@
             <a:r>
               <a:rPr sz="1200" b="1">
                 <a:solidFill>
-                  <a:srgbClr val="C07A1E"/>
-                </a:solidFill>
-                <a:latin typeface="Arial"/>
+                  <a:srgbClr val="D2452C"/>
+                </a:solidFill>
+                <a:latin typeface="Trebuchet MS"/>
               </a:rPr>
               <a:t>POSTER ART · T-P13-ART · coming</a:t>
             </a:r>
@@ -6424,9 +6424,9 @@
             <a:r>
               <a:rPr sz="1800" b="1">
                 <a:solidFill>
-                  <a:srgbClr val="1F4D2B"/>
-                </a:solidFill>
-                <a:latin typeface="Georgia"/>
+                  <a:srgbClr val="1C1C1C"/>
+                </a:solidFill>
+                <a:latin typeface="Segoe Print"/>
               </a:rPr>
               <a:t>Artwork for T-P13 · One lesson, three ways</a:t>
             </a:r>
@@ -6463,9 +6463,9 @@
             <a:r>
               <a:rPr sz="1100" b="0">
                 <a:solidFill>
-                  <a:srgbClr val="20190F"/>
-                </a:solidFill>
-                <a:latin typeface="Arial"/>
+                  <a:srgbClr val="1C1C1C"/>
+                </a:solidFill>
+                <a:latin typeface="Trebuchet MS"/>
               </a:rPr>
               <a:t>Three tall columns. Left: a poster on a fence with a group of five standing, one pointing. Middle, top: a laptop connected to a TV on a table in a shaded room with seated learners; middle, bottom: a group of five crowded around a tablet held by one of them. Right: a group of five watching a phone; beneath it, a hand signing on a phone screen with a…</a:t>
             </a:r>
@@ -6486,7 +6486,7 @@
     <p:bg>
       <p:bgPr>
         <a:solidFill>
-          <a:srgbClr val="F7F2E9"/>
+          <a:srgbClr val="C9A77C"/>
         </a:solidFill>
         <a:effectLst/>
       </p:bgPr>
@@ -6528,9 +6528,9 @@
             <a:r>
               <a:rPr sz="1000" b="0">
                 <a:solidFill>
-                  <a:srgbClr val="6B6255"/>
-                </a:solidFill>
-                <a:latin typeface="Arial"/>
+                  <a:srgbClr val="1C1C1C"/>
+                </a:solidFill>
+                <a:latin typeface="Trebuchet MS"/>
               </a:rPr>
               <a:t>T-D2-13   ·   Poster T-P13</a:t>
             </a:r>
@@ -6567,9 +6567,9 @@
             <a:r>
               <a:rPr sz="1000" b="0">
                 <a:solidFill>
-                  <a:srgbClr val="6B6255"/>
-                </a:solidFill>
-                <a:latin typeface="Arial"/>
+                  <a:srgbClr val="1C1C1C"/>
+                </a:solidFill>
+                <a:latin typeface="Trebuchet MS"/>
               </a:rPr>
               <a:t>Teach the Teachers</a:t>
             </a:r>
@@ -6606,9 +6606,9 @@
             <a:r>
               <a:rPr sz="3800" b="1">
                 <a:solidFill>
-                  <a:srgbClr val="1F4D2B"/>
-                </a:solidFill>
-                <a:latin typeface="Georgia"/>
+                  <a:srgbClr val="1C1C1C"/>
+                </a:solidFill>
+                <a:latin typeface="Segoe Print"/>
               </a:rPr>
               <a:t>Teach from a poster</a:t>
             </a:r>
@@ -6630,7 +6630,7 @@
             <a:avLst/>
           </a:prstGeom>
           <a:solidFill>
-            <a:srgbClr val="E2D8C4"/>
+            <a:srgbClr val="2C6FB7"/>
           </a:solidFill>
           <a:ln>
             <a:noFill/>
@@ -6689,9 +6689,9 @@
             <a:r>
               <a:rPr sz="2800" b="0">
                 <a:solidFill>
-                  <a:srgbClr val="20190F"/>
-                </a:solidFill>
-                <a:latin typeface="Arial"/>
+                  <a:srgbClr val="1C1C1C"/>
+                </a:solidFill>
+                <a:latin typeface="Trebuchet MS"/>
               </a:rPr>
               <a:t>•  Cover and reveal</a:t>
             </a:r>
@@ -6705,9 +6705,9 @@
             <a:r>
               <a:rPr sz="2800" b="0">
                 <a:solidFill>
-                  <a:srgbClr val="20190F"/>
-                </a:solidFill>
-                <a:latin typeface="Arial"/>
+                  <a:srgbClr val="1C1C1C"/>
+                </a:solidFill>
+                <a:latin typeface="Trebuchet MS"/>
               </a:rPr>
               <a:t>•  Point and ask</a:t>
             </a:r>
@@ -6721,9 +6721,9 @@
             <a:r>
               <a:rPr sz="2800" b="0">
                 <a:solidFill>
-                  <a:srgbClr val="20190F"/>
-                </a:solidFill>
-                <a:latin typeface="Arial"/>
+                  <a:srgbClr val="1C1C1C"/>
+                </a:solidFill>
+                <a:latin typeface="Trebuchet MS"/>
               </a:rPr>
               <a:t>•  Learners come to the poster</a:t>
             </a:r>
@@ -6745,11 +6745,11 @@
             <a:avLst/>
           </a:prstGeom>
           <a:solidFill>
-            <a:srgbClr val="FBF6EC"/>
+            <a:srgbClr val="C9A77C"/>
           </a:solidFill>
           <a:ln w="15875">
             <a:solidFill>
-              <a:srgbClr val="E2D8C4"/>
+              <a:srgbClr val="2C6FB7"/>
             </a:solidFill>
           </a:ln>
           <a:effectLst/>
@@ -6806,9 +6806,9 @@
             <a:r>
               <a:rPr sz="1200" b="1">
                 <a:solidFill>
-                  <a:srgbClr val="C07A1E"/>
-                </a:solidFill>
-                <a:latin typeface="Arial"/>
+                  <a:srgbClr val="D2452C"/>
+                </a:solidFill>
+                <a:latin typeface="Trebuchet MS"/>
               </a:rPr>
               <a:t>IMAGE · T-IMG-02 · coming</a:t>
             </a:r>
@@ -6845,9 +6845,9 @@
             <a:r>
               <a:rPr sz="1800" b="1">
                 <a:solidFill>
-                  <a:srgbClr val="1F4D2B"/>
-                </a:solidFill>
-                <a:latin typeface="Georgia"/>
+                  <a:srgbClr val="1C1C1C"/>
+                </a:solidFill>
+                <a:latin typeface="Segoe Print"/>
               </a:rPr>
               <a:t>Notes on the phone, poster on the fence</a:t>
             </a:r>
@@ -6884,9 +6884,9 @@
             <a:r>
               <a:rPr sz="1100" b="0">
                 <a:solidFill>
-                  <a:srgbClr val="20190F"/>
-                </a:solidFill>
-                <a:latin typeface="Arial"/>
+                  <a:srgbClr val="1C1C1C"/>
+                </a:solidFill>
+                <a:latin typeface="Trebuchet MS"/>
               </a:rPr>
               <a:t>A young female facilitator stands beside (not in front of) a poster tied to a wire fence with cable ties. She holds a phone low in one hand, glancing at it, and points with an open hand at a numbered circle on the poster. Five learners stand in a horseshoe facing the poster, one stepping forward to touch it. Garden beds behind. Poster content drawn as…</a:t>
             </a:r>
@@ -6907,7 +6907,7 @@
     <p:bg>
       <p:bgPr>
         <a:solidFill>
-          <a:srgbClr val="F7F2E9"/>
+          <a:srgbClr val="C9A77C"/>
         </a:solidFill>
         <a:effectLst/>
       </p:bgPr>
@@ -6949,9 +6949,9 @@
             <a:r>
               <a:rPr sz="1000" b="0">
                 <a:solidFill>
-                  <a:srgbClr val="6B6255"/>
-                </a:solidFill>
-                <a:latin typeface="Arial"/>
+                  <a:srgbClr val="1C1C1C"/>
+                </a:solidFill>
+                <a:latin typeface="Trebuchet MS"/>
               </a:rPr>
               <a:t>T-D2-14   ·   Poster T-P17</a:t>
             </a:r>
@@ -6988,9 +6988,9 @@
             <a:r>
               <a:rPr sz="1000" b="0">
                 <a:solidFill>
-                  <a:srgbClr val="6B6255"/>
-                </a:solidFill>
-                <a:latin typeface="Arial"/>
+                  <a:srgbClr val="1C1C1C"/>
+                </a:solidFill>
+                <a:latin typeface="Trebuchet MS"/>
               </a:rPr>
               <a:t>Teach the Teachers</a:t>
             </a:r>
@@ -7027,9 +7027,9 @@
             <a:r>
               <a:rPr sz="3800" b="1">
                 <a:solidFill>
-                  <a:srgbClr val="1F4D2B"/>
-                </a:solidFill>
-                <a:latin typeface="Georgia"/>
+                  <a:srgbClr val="1C1C1C"/>
+                </a:solidFill>
+                <a:latin typeface="Segoe Print"/>
               </a:rPr>
               <a:t>Everyone learns</a:t>
             </a:r>
@@ -7051,7 +7051,7 @@
             <a:avLst/>
           </a:prstGeom>
           <a:solidFill>
-            <a:srgbClr val="E2D8C4"/>
+            <a:srgbClr val="2C6FB7"/>
           </a:solidFill>
           <a:ln>
             <a:noFill/>
@@ -7110,9 +7110,9 @@
             <a:r>
               <a:rPr sz="2800" b="0">
                 <a:solidFill>
-                  <a:srgbClr val="20190F"/>
-                </a:solidFill>
-                <a:latin typeface="Arial"/>
+                  <a:srgbClr val="1C1C1C"/>
+                </a:solidFill>
+                <a:latin typeface="Trebuchet MS"/>
               </a:rPr>
               <a:t>•  Language time: retell it</a:t>
             </a:r>
@@ -7126,9 +7126,9 @@
             <a:r>
               <a:rPr sz="2800" b="0">
                 <a:solidFill>
-                  <a:srgbClr val="20190F"/>
-                </a:solidFill>
-                <a:latin typeface="Arial"/>
+                  <a:srgbClr val="1C1C1C"/>
+                </a:solidFill>
+                <a:latin typeface="Trebuchet MS"/>
               </a:rPr>
               <a:t>•  A role for everyone</a:t>
             </a:r>
@@ -7142,9 +7142,9 @@
             <a:r>
               <a:rPr sz="2800" b="0">
                 <a:solidFill>
-                  <a:srgbClr val="20190F"/>
-                </a:solidFill>
-                <a:latin typeface="Arial"/>
+                  <a:srgbClr val="1C1C1C"/>
+                </a:solidFill>
+                <a:latin typeface="Trebuchet MS"/>
               </a:rPr>
               <a:t>•  Seated jobs, picture labels</a:t>
             </a:r>
@@ -7166,11 +7166,11 @@
             <a:avLst/>
           </a:prstGeom>
           <a:solidFill>
-            <a:srgbClr val="FBF6EC"/>
+            <a:srgbClr val="C9A77C"/>
           </a:solidFill>
           <a:ln w="15875">
             <a:solidFill>
-              <a:srgbClr val="E2D8C4"/>
+              <a:srgbClr val="2C6FB7"/>
             </a:solidFill>
           </a:ln>
           <a:effectLst/>
@@ -7227,9 +7227,9 @@
             <a:r>
               <a:rPr sz="1200" b="1">
                 <a:solidFill>
-                  <a:srgbClr val="C07A1E"/>
-                </a:solidFill>
-                <a:latin typeface="Arial"/>
+                  <a:srgbClr val="D2452C"/>
+                </a:solidFill>
+                <a:latin typeface="Trebuchet MS"/>
               </a:rPr>
               <a:t>POSTER ART · T-P17-ART · coming</a:t>
             </a:r>
@@ -7266,9 +7266,9 @@
             <a:r>
               <a:rPr sz="1800" b="1">
                 <a:solidFill>
-                  <a:srgbClr val="1F4D2B"/>
-                </a:solidFill>
-                <a:latin typeface="Georgia"/>
+                  <a:srgbClr val="1C1C1C"/>
+                </a:solidFill>
+                <a:latin typeface="Segoe Print"/>
               </a:rPr>
               <a:t>Artwork for T-P17 · Everyone learns</a:t>
             </a:r>
@@ -7305,9 +7305,9 @@
             <a:r>
               <a:rPr sz="1100" b="0">
                 <a:solidFill>
-                  <a:srgbClr val="20190F"/>
-                </a:solidFill>
-                <a:latin typeface="Arial"/>
+                  <a:srgbClr val="1C1C1C"/>
+                </a:solidFill>
+                <a:latin typeface="Trebuchet MS"/>
               </a:rPr>
               <a:t>A mixed group of five at a raised table outside, mixing seedling soil: a gogo seated, showing seeds in her palm to others; a young man in a wheelchair at the table's end mixing soil with both hands; a young mother with a baby tied on her back; an older man seated close to the facilitator, watching her face as she speaks; two young women talking side by…</a:t>
             </a:r>
@@ -7328,7 +7328,7 @@
     <p:bg>
       <p:bgPr>
         <a:solidFill>
-          <a:srgbClr val="F7F2E9"/>
+          <a:srgbClr val="C9A77C"/>
         </a:solidFill>
         <a:effectLst/>
       </p:bgPr>
@@ -7370,9 +7370,9 @@
             <a:r>
               <a:rPr sz="1000" b="0">
                 <a:solidFill>
-                  <a:srgbClr val="6B6255"/>
-                </a:solidFill>
-                <a:latin typeface="Arial"/>
+                  <a:srgbClr val="1C1C1C"/>
+                </a:solidFill>
+                <a:latin typeface="Trebuchet MS"/>
               </a:rPr>
               <a:t>T-D2-15   ·   Poster T-P04</a:t>
             </a:r>
@@ -7409,9 +7409,9 @@
             <a:r>
               <a:rPr sz="1000" b="0">
                 <a:solidFill>
-                  <a:srgbClr val="6B6255"/>
-                </a:solidFill>
-                <a:latin typeface="Arial"/>
+                  <a:srgbClr val="1C1C1C"/>
+                </a:solidFill>
+                <a:latin typeface="Trebuchet MS"/>
               </a:rPr>
               <a:t>Teach the Teachers</a:t>
             </a:r>
@@ -7433,7 +7433,7 @@
             <a:avLst/>
           </a:prstGeom>
           <a:solidFill>
-            <a:srgbClr val="C07A1E"/>
+            <a:srgbClr val="D2452C"/>
           </a:solidFill>
           <a:ln>
             <a:noFill/>
@@ -7492,9 +7492,9 @@
             <a:r>
               <a:rPr sz="1400" b="1">
                 <a:solidFill>
-                  <a:srgbClr val="F7F2E9"/>
-                </a:solidFill>
-                <a:latin typeface="Arial"/>
+                  <a:srgbClr val="C9A77C"/>
+                </a:solidFill>
+                <a:latin typeface="Trebuchet MS"/>
               </a:rPr>
               <a:t>YOUR TURN</a:t>
             </a:r>
@@ -7531,9 +7531,9 @@
             <a:r>
               <a:rPr sz="3800" b="1">
                 <a:solidFill>
-                  <a:srgbClr val="1F4D2B"/>
-                </a:solidFill>
-                <a:latin typeface="Georgia"/>
+                  <a:srgbClr val="1C1C1C"/>
+                </a:solidFill>
+                <a:latin typeface="Segoe Print"/>
               </a:rPr>
               <a:t>Micro-teaching Round 2</a:t>
             </a:r>
@@ -7555,7 +7555,7 @@
             <a:avLst/>
           </a:prstGeom>
           <a:solidFill>
-            <a:srgbClr val="E2D8C4"/>
+            <a:srgbClr val="2C6FB7"/>
           </a:solidFill>
           <a:ln>
             <a:noFill/>
@@ -7614,9 +7614,9 @@
             <a:r>
               <a:rPr sz="2600" b="1">
                 <a:solidFill>
-                  <a:srgbClr val="20190F"/>
-                </a:solidFill>
-                <a:latin typeface="Arial"/>
+                  <a:srgbClr val="1C1C1C"/>
+                </a:solidFill>
+                <a:latin typeface="Trebuchet MS"/>
               </a:rPr>
               <a:t>•  10 minutes, solo, posters only</a:t>
             </a:r>
@@ -7630,9 +7630,9 @@
             <a:r>
               <a:rPr sz="2600" b="1">
                 <a:solidFill>
-                  <a:srgbClr val="20190F"/>
-                </a:solidFill>
-                <a:latin typeface="Arial"/>
+                  <a:srgbClr val="1C1C1C"/>
+                </a:solidFill>
+                <a:latin typeface="Trebuchet MS"/>
               </a:rPr>
               <a:t>•  Observer counts talk and questions</a:t>
             </a:r>
@@ -7646,9 +7646,9 @@
             <a:r>
               <a:rPr sz="2600" b="1">
                 <a:solidFill>
-                  <a:srgbClr val="20190F"/>
-                </a:solidFill>
-                <a:latin typeface="Arial"/>
+                  <a:srgbClr val="1C1C1C"/>
+                </a:solidFill>
+                <a:latin typeface="Trebuchet MS"/>
               </a:rPr>
               <a:t>•  6 minutes feedback</a:t>
             </a:r>
@@ -7670,11 +7670,11 @@
             <a:avLst/>
           </a:prstGeom>
           <a:solidFill>
-            <a:srgbClr val="FBF6EC"/>
+            <a:srgbClr val="C9A77C"/>
           </a:solidFill>
           <a:ln w="15875">
             <a:solidFill>
-              <a:srgbClr val="E2D8C4"/>
+              <a:srgbClr val="2C6FB7"/>
             </a:solidFill>
           </a:ln>
           <a:effectLst/>
@@ -7731,9 +7731,9 @@
             <a:r>
               <a:rPr sz="1200" b="1">
                 <a:solidFill>
-                  <a:srgbClr val="C07A1E"/>
-                </a:solidFill>
-                <a:latin typeface="Arial"/>
+                  <a:srgbClr val="D2452C"/>
+                </a:solidFill>
+                <a:latin typeface="Trebuchet MS"/>
               </a:rPr>
               <a:t>IMAGE · T-IMG-05 · coming</a:t>
             </a:r>
@@ -7770,9 +7770,9 @@
             <a:r>
               <a:rPr sz="1800" b="1">
                 <a:solidFill>
-                  <a:srgbClr val="1F4D2B"/>
-                </a:solidFill>
-                <a:latin typeface="Georgia"/>
+                  <a:srgbClr val="1C1C1C"/>
+                </a:solidFill>
+                <a:latin typeface="Segoe Print"/>
               </a:rPr>
               <a:t>A micro-teach in a small circle</a:t>
             </a:r>
@@ -7809,9 +7809,9 @@
             <a:r>
               <a:rPr sz="1100" b="0">
                 <a:solidFill>
-                  <a:srgbClr val="20190F"/>
-                </a:solidFill>
-                <a:latin typeface="Arial"/>
+                  <a:srgbClr val="1C1C1C"/>
+                </a:solidFill>
+                <a:latin typeface="Trebuchet MS"/>
               </a:rPr>
               <a:t>Five adults in a small circle of chairs in the corner of a hall. One young man (teaching) holds up a cut-open 2 ℓ bottle of soil while three peers lean forward, one pouring water. A fourth person, an older woman, sits slightly back with a clipboard, making tally marks (simple strokes). A second person holds up a small red card (the STOP card, no text). A…</a:t>
             </a:r>
@@ -7832,7 +7832,7 @@
     <p:bg>
       <p:bgPr>
         <a:solidFill>
-          <a:srgbClr val="F7F2E9"/>
+          <a:srgbClr val="C9A77C"/>
         </a:solidFill>
         <a:effectLst/>
       </p:bgPr>
@@ -7874,9 +7874,9 @@
             <a:r>
               <a:rPr sz="1000" b="0">
                 <a:solidFill>
-                  <a:srgbClr val="6B6255"/>
-                </a:solidFill>
-                <a:latin typeface="Arial"/>
+                  <a:srgbClr val="1C1C1C"/>
+                </a:solidFill>
+                <a:latin typeface="Trebuchet MS"/>
               </a:rPr>
               <a:t>T-D2-16   ·   Poster T-P04</a:t>
             </a:r>
@@ -7913,9 +7913,9 @@
             <a:r>
               <a:rPr sz="1000" b="0">
                 <a:solidFill>
-                  <a:srgbClr val="6B6255"/>
-                </a:solidFill>
-                <a:latin typeface="Arial"/>
+                  <a:srgbClr val="1C1C1C"/>
+                </a:solidFill>
+                <a:latin typeface="Trebuchet MS"/>
               </a:rPr>
               <a:t>Teach the Teachers</a:t>
             </a:r>
@@ -7952,9 +7952,9 @@
             <a:r>
               <a:rPr sz="3800" b="1">
                 <a:solidFill>
-                  <a:srgbClr val="1F4D2B"/>
-                </a:solidFill>
-                <a:latin typeface="Georgia"/>
+                  <a:srgbClr val="1C1C1C"/>
+                </a:solidFill>
+                <a:latin typeface="Segoe Print"/>
               </a:rPr>
               <a:t>The talk scoreboard</a:t>
             </a:r>
@@ -7976,7 +7976,7 @@
             <a:avLst/>
           </a:prstGeom>
           <a:solidFill>
-            <a:srgbClr val="E2D8C4"/>
+            <a:srgbClr val="2C6FB7"/>
           </a:solidFill>
           <a:ln>
             <a:noFill/>
@@ -8035,9 +8035,9 @@
             <a:r>
               <a:rPr sz="2800" b="0">
                 <a:solidFill>
-                  <a:srgbClr val="20190F"/>
-                </a:solidFill>
-                <a:latin typeface="Arial"/>
+                  <a:srgbClr val="1C1C1C"/>
+                </a:solidFill>
+                <a:latin typeface="Trebuchet MS"/>
               </a:rPr>
               <a:t>•  Write your own talk %</a:t>
             </a:r>
@@ -8051,9 +8051,9 @@
             <a:r>
               <a:rPr sz="2800" b="0">
                 <a:solidFill>
-                  <a:srgbClr val="20190F"/>
-                </a:solidFill>
-                <a:latin typeface="Arial"/>
+                  <a:srgbClr val="1C1C1C"/>
+                </a:solidFill>
+                <a:latin typeface="Trebuchet MS"/>
               </a:rPr>
               <a:t>•  What helped you talk less?</a:t>
             </a:r>
@@ -8075,11 +8075,11 @@
             <a:avLst/>
           </a:prstGeom>
           <a:solidFill>
-            <a:srgbClr val="FBF6EC"/>
+            <a:srgbClr val="C9A77C"/>
           </a:solidFill>
           <a:ln w="15875">
             <a:solidFill>
-              <a:srgbClr val="E2D8C4"/>
+              <a:srgbClr val="2C6FB7"/>
             </a:solidFill>
           </a:ln>
           <a:effectLst/>
@@ -8136,9 +8136,9 @@
             <a:r>
               <a:rPr sz="1200" b="1">
                 <a:solidFill>
-                  <a:srgbClr val="C07A1E"/>
-                </a:solidFill>
-                <a:latin typeface="Arial"/>
+                  <a:srgbClr val="D2452C"/>
+                </a:solidFill>
+                <a:latin typeface="Trebuchet MS"/>
               </a:rPr>
               <a:t>POSTER ART · T-P04-ART · coming</a:t>
             </a:r>
@@ -8175,9 +8175,9 @@
             <a:r>
               <a:rPr sz="1800" b="1">
                 <a:solidFill>
-                  <a:srgbClr val="1F4D2B"/>
-                </a:solidFill>
-                <a:latin typeface="Georgia"/>
+                  <a:srgbClr val="1C1C1C"/>
+                </a:solidFill>
+                <a:latin typeface="Segoe Print"/>
               </a:rPr>
               <a:t>Artwork for T-P04 · The teacher-talk meter</a:t>
             </a:r>
@@ -8214,9 +8214,9 @@
             <a:r>
               <a:rPr sz="1100" b="0">
                 <a:solidFill>
-                  <a:srgbClr val="20190F"/>
-                </a:solidFill>
-                <a:latin typeface="Arial"/>
+                  <a:srgbClr val="1C1C1C"/>
+                </a:solidFill>
+                <a:latin typeface="Trebuchet MS"/>
               </a:rPr>
               <a:t>Top half: a big half-circle gauge, like a fuel gauge, split into ten equal wedges — three Ochre wedges on the left, seven Leaf-green wedges on the right (the Leaf wedges also carry small dot pattern so it works in black and white). A thick Ink needle points into the third Ochre wedge. Bottom half: a facilitator stands to one side with an open hand…</a:t>
             </a:r>
@@ -8237,7 +8237,7 @@
     <p:bg>
       <p:bgPr>
         <a:solidFill>
-          <a:srgbClr val="F7F2E9"/>
+          <a:srgbClr val="C9A77C"/>
         </a:solidFill>
         <a:effectLst/>
       </p:bgPr>
@@ -8279,9 +8279,9 @@
             <a:r>
               <a:rPr sz="1000" b="0">
                 <a:solidFill>
-                  <a:srgbClr val="6B6255"/>
-                </a:solidFill>
-                <a:latin typeface="Arial"/>
+                  <a:srgbClr val="1C1C1C"/>
+                </a:solidFill>
+                <a:latin typeface="Trebuchet MS"/>
               </a:rPr>
               <a:t>T-D2-17   ·   Poster T-P17</a:t>
             </a:r>
@@ -8318,9 +8318,9 @@
             <a:r>
               <a:rPr sz="1000" b="0">
                 <a:solidFill>
-                  <a:srgbClr val="6B6255"/>
-                </a:solidFill>
-                <a:latin typeface="Arial"/>
+                  <a:srgbClr val="1C1C1C"/>
+                </a:solidFill>
+                <a:latin typeface="Trebuchet MS"/>
               </a:rPr>
               <a:t>Teach the Teachers</a:t>
             </a:r>
@@ -8357,9 +8357,9 @@
             <a:r>
               <a:rPr sz="3800" b="1">
                 <a:solidFill>
-                  <a:srgbClr val="1F4D2B"/>
-                </a:solidFill>
-                <a:latin typeface="Georgia"/>
+                  <a:srgbClr val="1C1C1C"/>
+                </a:solidFill>
+                <a:latin typeface="Segoe Print"/>
               </a:rPr>
               <a:t>Course craft: POPIA</a:t>
             </a:r>
@@ -8381,7 +8381,7 @@
             <a:avLst/>
           </a:prstGeom>
           <a:solidFill>
-            <a:srgbClr val="E2D8C4"/>
+            <a:srgbClr val="2C6FB7"/>
           </a:solidFill>
           <a:ln>
             <a:noFill/>
@@ -8440,9 +8440,9 @@
             <a:r>
               <a:rPr sz="2800" b="0">
                 <a:solidFill>
-                  <a:srgbClr val="20190F"/>
-                </a:solidFill>
-                <a:latin typeface="Arial"/>
+                  <a:srgbClr val="1C1C1C"/>
+                </a:solidFill>
+                <a:latin typeface="Trebuchet MS"/>
               </a:rPr>
               <a:t>•  Consent before the camera</a:t>
             </a:r>
@@ -8456,9 +8456,9 @@
             <a:r>
               <a:rPr sz="2800" b="0">
                 <a:solidFill>
-                  <a:srgbClr val="20190F"/>
-                </a:solidFill>
-                <a:latin typeface="Arial"/>
+                  <a:srgbClr val="1C1C1C"/>
+                </a:solidFill>
+                <a:latin typeface="Trebuchet MS"/>
               </a:rPr>
               <a:t>•  Green dot = no photos</a:t>
             </a:r>
@@ -8472,9 +8472,9 @@
             <a:r>
               <a:rPr sz="2800" b="0">
                 <a:solidFill>
-                  <a:srgbClr val="20190F"/>
-                </a:solidFill>
-                <a:latin typeface="Arial"/>
+                  <a:srgbClr val="1C1C1C"/>
+                </a:solidFill>
+                <a:latin typeface="Trebuchet MS"/>
               </a:rPr>
               <a:t>•  Share only what was agreed</a:t>
             </a:r>
@@ -8496,11 +8496,11 @@
             <a:avLst/>
           </a:prstGeom>
           <a:solidFill>
-            <a:srgbClr val="FBF6EC"/>
+            <a:srgbClr val="C9A77C"/>
           </a:solidFill>
           <a:ln w="15875">
             <a:solidFill>
-              <a:srgbClr val="E2D8C4"/>
+              <a:srgbClr val="2C6FB7"/>
             </a:solidFill>
           </a:ln>
           <a:effectLst/>
@@ -8557,9 +8557,9 @@
             <a:r>
               <a:rPr sz="1200" b="1">
                 <a:solidFill>
-                  <a:srgbClr val="C07A1E"/>
-                </a:solidFill>
-                <a:latin typeface="Arial"/>
+                  <a:srgbClr val="D2452C"/>
+                </a:solidFill>
+                <a:latin typeface="Trebuchet MS"/>
               </a:rPr>
               <a:t>IMAGE · T-IMG-15 · coming</a:t>
             </a:r>
@@ -8596,9 +8596,9 @@
             <a:r>
               <a:rPr sz="1800" b="1">
                 <a:solidFill>
-                  <a:srgbClr val="1F4D2B"/>
-                </a:solidFill>
-                <a:latin typeface="Georgia"/>
+                  <a:srgbClr val="1C1C1C"/>
+                </a:solidFill>
+                <a:latin typeface="Segoe Print"/>
               </a:rPr>
               <a:t>The register at the door</a:t>
             </a:r>
@@ -8635,9 +8635,9 @@
             <a:r>
               <a:rPr sz="1100" b="0">
                 <a:solidFill>
-                  <a:srgbClr val="20190F"/>
-                </a:solidFill>
-                <a:latin typeface="Arial"/>
+                  <a:srgbClr val="1C1C1C"/>
+                </a:solidFill>
+                <a:latin typeface="Trebuchet MS"/>
               </a:rPr>
               <a:t>A small table at a hall doorway in the morning light. A young man signs a register on a clipboard (grid lines, no letters) while an older woman presses her thumb onto an ink pad to mark her name. A facilitator beside them holds name tags; a small sheet of green dot stickers sits on the table. A queue of three learners waits, chatting.</a:t>
             </a:r>
@@ -8658,7 +8658,7 @@
     <p:bg>
       <p:bgPr>
         <a:solidFill>
-          <a:srgbClr val="F7F2E9"/>
+          <a:srgbClr val="C9A77C"/>
         </a:solidFill>
         <a:effectLst/>
       </p:bgPr>
@@ -8700,9 +8700,9 @@
             <a:r>
               <a:rPr sz="1000" b="0">
                 <a:solidFill>
-                  <a:srgbClr val="6B6255"/>
-                </a:solidFill>
-                <a:latin typeface="Arial"/>
+                  <a:srgbClr val="1C1C1C"/>
+                </a:solidFill>
+                <a:latin typeface="Trebuchet MS"/>
               </a:rPr>
               <a:t>T-D2-02   ·   Poster T-P11</a:t>
             </a:r>
@@ -8739,9 +8739,9 @@
             <a:r>
               <a:rPr sz="1000" b="0">
                 <a:solidFill>
-                  <a:srgbClr val="6B6255"/>
-                </a:solidFill>
-                <a:latin typeface="Arial"/>
+                  <a:srgbClr val="1C1C1C"/>
+                </a:solidFill>
+                <a:latin typeface="Trebuchet MS"/>
               </a:rPr>
               <a:t>Teach the Teachers</a:t>
             </a:r>
@@ -8778,9 +8778,9 @@
             <a:r>
               <a:rPr sz="3800" b="1">
                 <a:solidFill>
-                  <a:srgbClr val="1F4D2B"/>
-                </a:solidFill>
-                <a:latin typeface="Georgia"/>
+                  <a:srgbClr val="1C1C1C"/>
+                </a:solidFill>
+                <a:latin typeface="Segoe Print"/>
               </a:rPr>
               <a:t>What did you sleep on?</a:t>
             </a:r>
@@ -8802,7 +8802,7 @@
             <a:avLst/>
           </a:prstGeom>
           <a:solidFill>
-            <a:srgbClr val="E2D8C4"/>
+            <a:srgbClr val="2C6FB7"/>
           </a:solidFill>
           <a:ln>
             <a:noFill/>
@@ -8861,9 +8861,9 @@
             <a:r>
               <a:rPr sz="2800" b="0">
                 <a:solidFill>
-                  <a:srgbClr val="20190F"/>
-                </a:solidFill>
-                <a:latin typeface="Arial"/>
+                  <a:srgbClr val="1C1C1C"/>
+                </a:solidFill>
+                <a:latin typeface="Trebuchet MS"/>
               </a:rPr>
               <a:t>•  One thing you remember</a:t>
             </a:r>
@@ -8877,9 +8877,9 @@
             <a:r>
               <a:rPr sz="2800" b="0">
                 <a:solidFill>
-                  <a:srgbClr val="20190F"/>
-                </a:solidFill>
-                <a:latin typeface="Arial"/>
+                  <a:srgbClr val="1C1C1C"/>
+                </a:solidFill>
+                <a:latin typeface="Trebuchet MS"/>
               </a:rPr>
               <a:t>•  One question you woke with</a:t>
             </a:r>
@@ -8901,11 +8901,11 @@
             <a:avLst/>
           </a:prstGeom>
           <a:solidFill>
-            <a:srgbClr val="FBF6EC"/>
+            <a:srgbClr val="C9A77C"/>
           </a:solidFill>
           <a:ln w="15875">
             <a:solidFill>
-              <a:srgbClr val="E2D8C4"/>
+              <a:srgbClr val="2C6FB7"/>
             </a:solidFill>
           </a:ln>
           <a:effectLst/>
@@ -8962,9 +8962,9 @@
             <a:r>
               <a:rPr sz="1200" b="1">
                 <a:solidFill>
-                  <a:srgbClr val="C07A1E"/>
-                </a:solidFill>
-                <a:latin typeface="Arial"/>
+                  <a:srgbClr val="D2452C"/>
+                </a:solidFill>
+                <a:latin typeface="Trebuchet MS"/>
               </a:rPr>
               <a:t>IMAGE · T-IMG-01 · coming</a:t>
             </a:r>
@@ -9001,9 +9001,9 @@
             <a:r>
               <a:rPr sz="1800" b="1">
                 <a:solidFill>
-                  <a:srgbClr val="1F4D2B"/>
-                </a:solidFill>
-                <a:latin typeface="Georgia"/>
+                  <a:srgbClr val="1C1C1C"/>
+                </a:solidFill>
+                <a:latin typeface="Segoe Print"/>
               </a:rPr>
               <a:t>A learning circle under a tree</a:t>
             </a:r>
@@ -9040,9 +9040,9 @@
             <a:r>
               <a:rPr sz="1100" b="0">
                 <a:solidFill>
-                  <a:srgbClr val="20190F"/>
-                </a:solidFill>
-                <a:latin typeface="Arial"/>
+                  <a:srgbClr val="1C1C1C"/>
+                </a:solidFill>
+                <a:latin typeface="Trebuchet MS"/>
               </a:rPr>
               <a:t>Twenty adults sit in a wide circle on plastic chairs and a wooden bench under a big shade tree beside a rural community hall. Mixed ages: young graduates in trainers and T-shirts, two extension officers in work shirts, gogos in headscarves, an older lead farmer in a hat. One young woman stands, mid-sentence, hands open; others lean in, some laughing.…</a:t>
             </a:r>
@@ -9063,7 +9063,7 @@
     <p:bg>
       <p:bgPr>
         <a:solidFill>
-          <a:srgbClr val="F7F2E9"/>
+          <a:srgbClr val="C9A77C"/>
         </a:solidFill>
         <a:effectLst/>
       </p:bgPr>
@@ -9105,9 +9105,9 @@
             <a:r>
               <a:rPr sz="1000" b="0">
                 <a:solidFill>
-                  <a:srgbClr val="6B6255"/>
-                </a:solidFill>
-                <a:latin typeface="Arial"/>
+                  <a:srgbClr val="1C1C1C"/>
+                </a:solidFill>
+                <a:latin typeface="Trebuchet MS"/>
               </a:rPr>
               <a:t>T-D2-03   ·   Poster T-P05</a:t>
             </a:r>
@@ -9144,9 +9144,9 @@
             <a:r>
               <a:rPr sz="1000" b="0">
                 <a:solidFill>
-                  <a:srgbClr val="6B6255"/>
-                </a:solidFill>
-                <a:latin typeface="Arial"/>
+                  <a:srgbClr val="1C1C1C"/>
+                </a:solidFill>
+                <a:latin typeface="Trebuchet MS"/>
               </a:rPr>
               <a:t>Teach the Teachers</a:t>
             </a:r>
@@ -9183,9 +9183,9 @@
             <a:r>
               <a:rPr sz="3800" b="1">
                 <a:solidFill>
-                  <a:srgbClr val="1F4D2B"/>
-                </a:solidFill>
-                <a:latin typeface="Georgia"/>
+                  <a:srgbClr val="1C1C1C"/>
+                </a:solidFill>
+                <a:latin typeface="Segoe Print"/>
               </a:rPr>
               <a:t>Which outcome can you see?</a:t>
             </a:r>
@@ -9207,7 +9207,7 @@
             <a:avLst/>
           </a:prstGeom>
           <a:solidFill>
-            <a:srgbClr val="E2D8C4"/>
+            <a:srgbClr val="2C6FB7"/>
           </a:solidFill>
           <a:ln>
             <a:noFill/>
@@ -9266,9 +9266,9 @@
             <a:r>
               <a:rPr sz="2800" b="0">
                 <a:solidFill>
-                  <a:srgbClr val="20190F"/>
-                </a:solidFill>
-                <a:latin typeface="Arial"/>
+                  <a:srgbClr val="1C1C1C"/>
+                </a:solidFill>
+                <a:latin typeface="Trebuchet MS"/>
               </a:rPr>
               <a:t>•  A: understand compost</a:t>
             </a:r>
@@ -9282,9 +9282,9 @@
             <a:r>
               <a:rPr sz="2800" b="0">
                 <a:solidFill>
-                  <a:srgbClr val="20190F"/>
-                </a:solidFill>
-                <a:latin typeface="Arial"/>
+                  <a:srgbClr val="1C1C1C"/>
+                </a:solidFill>
+                <a:latin typeface="Trebuchet MS"/>
               </a:rPr>
               <a:t>•  B: build a 1 m layered heap</a:t>
             </a:r>
@@ -9306,11 +9306,11 @@
             <a:avLst/>
           </a:prstGeom>
           <a:solidFill>
-            <a:srgbClr val="FBF6EC"/>
+            <a:srgbClr val="C9A77C"/>
           </a:solidFill>
           <a:ln w="15875">
             <a:solidFill>
-              <a:srgbClr val="E2D8C4"/>
+              <a:srgbClr val="2C6FB7"/>
             </a:solidFill>
           </a:ln>
           <a:effectLst/>
@@ -9367,9 +9367,9 @@
             <a:r>
               <a:rPr sz="1200" b="1">
                 <a:solidFill>
-                  <a:srgbClr val="C07A1E"/>
-                </a:solidFill>
-                <a:latin typeface="Arial"/>
+                  <a:srgbClr val="D2452C"/>
+                </a:solidFill>
+                <a:latin typeface="Trebuchet MS"/>
               </a:rPr>
               <a:t>POSTER ART · T-P05-ART · coming</a:t>
             </a:r>
@@ -9406,9 +9406,9 @@
             <a:r>
               <a:rPr sz="1800" b="1">
                 <a:solidFill>
-                  <a:srgbClr val="1F4D2B"/>
-                </a:solidFill>
-                <a:latin typeface="Georgia"/>
+                  <a:srgbClr val="1C1C1C"/>
+                </a:solidFill>
+                <a:latin typeface="Segoe Print"/>
               </a:rPr>
               <a:t>Artwork for T-P05 · Outcomes start with a doing word</a:t>
             </a:r>
@@ -9445,9 +9445,9 @@
             <a:r>
               <a:rPr sz="1100" b="0">
                 <a:solidFill>
-                  <a:srgbClr val="20190F"/>
-                </a:solidFill>
-                <a:latin typeface="Arial"/>
+                  <a:srgbClr val="1C1C1C"/>
+                </a:solidFill>
+                <a:latin typeface="Trebuchet MS"/>
               </a:rPr>
               <a:t>A young farmer stands proudly beside a finished, neatly layered compost heap about waist high, pointing to its layers. A facilitator beside her holds a clipboard and draws a tick shape. In the background, a clock shape on a wall shows the hands near twelve (midday). Three big ochre callout circles sit on: the farmer's pointing hand (①), the heap (②), and…</a:t>
             </a:r>
@@ -9468,7 +9468,7 @@
     <p:bg>
       <p:bgPr>
         <a:solidFill>
-          <a:srgbClr val="F7F2E9"/>
+          <a:srgbClr val="C9A77C"/>
         </a:solidFill>
         <a:effectLst/>
       </p:bgPr>
@@ -9510,9 +9510,9 @@
             <a:r>
               <a:rPr sz="1000" b="0">
                 <a:solidFill>
-                  <a:srgbClr val="6B6255"/>
-                </a:solidFill>
-                <a:latin typeface="Arial"/>
+                  <a:srgbClr val="1C1C1C"/>
+                </a:solidFill>
+                <a:latin typeface="Trebuchet MS"/>
               </a:rPr>
               <a:t>T-D2-04   ·   Poster T-P05</a:t>
             </a:r>
@@ -9549,9 +9549,9 @@
             <a:r>
               <a:rPr sz="1000" b="0">
                 <a:solidFill>
-                  <a:srgbClr val="6B6255"/>
-                </a:solidFill>
-                <a:latin typeface="Arial"/>
+                  <a:srgbClr val="1C1C1C"/>
+                </a:solidFill>
+                <a:latin typeface="Trebuchet MS"/>
               </a:rPr>
               <a:t>Teach the Teachers</a:t>
             </a:r>
@@ -9588,9 +9588,9 @@
             <a:r>
               <a:rPr sz="3800" b="1">
                 <a:solidFill>
-                  <a:srgbClr val="1F4D2B"/>
-                </a:solidFill>
-                <a:latin typeface="Georgia"/>
+                  <a:srgbClr val="1C1C1C"/>
+                </a:solidFill>
+                <a:latin typeface="Segoe Print"/>
               </a:rPr>
               <a:t>Start with a doing word</a:t>
             </a:r>
@@ -9612,7 +9612,7 @@
             <a:avLst/>
           </a:prstGeom>
           <a:solidFill>
-            <a:srgbClr val="E2D8C4"/>
+            <a:srgbClr val="2C6FB7"/>
           </a:solidFill>
           <a:ln>
             <a:noFill/>
@@ -9671,9 +9671,9 @@
             <a:r>
               <a:rPr sz="2400" b="0">
                 <a:solidFill>
-                  <a:srgbClr val="20190F"/>
-                </a:solidFill>
-                <a:latin typeface="Arial"/>
+                  <a:srgbClr val="1C1C1C"/>
+                </a:solidFill>
+                <a:latin typeface="Trebuchet MS"/>
               </a:rPr>
               <a:t>•  A doing word · What · How well</a:t>
             </a:r>
@@ -9687,9 +9687,9 @@
             <a:r>
               <a:rPr sz="2400" b="0">
                 <a:solidFill>
-                  <a:srgbClr val="20190F"/>
-                </a:solidFill>
-                <a:latin typeface="Arial"/>
+                  <a:srgbClr val="1C1C1C"/>
+                </a:solidFill>
+                <a:latin typeface="Trebuchet MS"/>
               </a:rPr>
               <a:t>•  Make, show, find, measure, explain</a:t>
             </a:r>
@@ -9703,9 +9703,9 @@
             <a:r>
               <a:rPr sz="2400" b="0">
                 <a:solidFill>
-                  <a:srgbClr val="20190F"/>
-                </a:solidFill>
-                <a:latin typeface="Arial"/>
+                  <a:srgbClr val="1C1C1C"/>
+                </a:solidFill>
+                <a:latin typeface="Trebuchet MS"/>
               </a:rPr>
               <a:t>•  Could you see it by lunch?</a:t>
             </a:r>
@@ -9727,11 +9727,11 @@
             <a:avLst/>
           </a:prstGeom>
           <a:solidFill>
-            <a:srgbClr val="FBF6EC"/>
+            <a:srgbClr val="C9A77C"/>
           </a:solidFill>
           <a:ln w="15875">
             <a:solidFill>
-              <a:srgbClr val="E2D8C4"/>
+              <a:srgbClr val="2C6FB7"/>
             </a:solidFill>
           </a:ln>
           <a:effectLst/>
@@ -9788,9 +9788,9 @@
             <a:r>
               <a:rPr sz="1200" b="1">
                 <a:solidFill>
-                  <a:srgbClr val="C07A1E"/>
-                </a:solidFill>
-                <a:latin typeface="Arial"/>
+                  <a:srgbClr val="D2452C"/>
+                </a:solidFill>
+                <a:latin typeface="Trebuchet MS"/>
               </a:rPr>
               <a:t>POSTER ART · T-P05-ART · coming</a:t>
             </a:r>
@@ -9827,9 +9827,9 @@
             <a:r>
               <a:rPr sz="1800" b="1">
                 <a:solidFill>
-                  <a:srgbClr val="1F4D2B"/>
-                </a:solidFill>
-                <a:latin typeface="Georgia"/>
+                  <a:srgbClr val="1C1C1C"/>
+                </a:solidFill>
+                <a:latin typeface="Segoe Print"/>
               </a:rPr>
               <a:t>Artwork for T-P05 · Outcomes start with a doing word</a:t>
             </a:r>
@@ -9866,9 +9866,9 @@
             <a:r>
               <a:rPr sz="1100" b="0">
                 <a:solidFill>
-                  <a:srgbClr val="20190F"/>
-                </a:solidFill>
-                <a:latin typeface="Arial"/>
+                  <a:srgbClr val="1C1C1C"/>
+                </a:solidFill>
+                <a:latin typeface="Trebuchet MS"/>
               </a:rPr>
               <a:t>A young farmer stands proudly beside a finished, neatly layered compost heap about waist high, pointing to its layers. A facilitator beside her holds a clipboard and draws a tick shape. In the background, a clock shape on a wall shows the hands near twelve (midday). Three big ochre callout circles sit on: the farmer's pointing hand (①), the heap (②), and…</a:t>
             </a:r>
@@ -9889,7 +9889,7 @@
     <p:bg>
       <p:bgPr>
         <a:solidFill>
-          <a:srgbClr val="F7F2E9"/>
+          <a:srgbClr val="C9A77C"/>
         </a:solidFill>
         <a:effectLst/>
       </p:bgPr>
@@ -9931,9 +9931,9 @@
             <a:r>
               <a:rPr sz="1000" b="0">
                 <a:solidFill>
-                  <a:srgbClr val="6B6255"/>
-                </a:solidFill>
-                <a:latin typeface="Arial"/>
+                  <a:srgbClr val="1C1C1C"/>
+                </a:solidFill>
+                <a:latin typeface="Trebuchet MS"/>
               </a:rPr>
               <a:t>T-D2-05   ·   Poster T-P08</a:t>
             </a:r>
@@ -9970,9 +9970,9 @@
             <a:r>
               <a:rPr sz="1000" b="0">
                 <a:solidFill>
-                  <a:srgbClr val="6B6255"/>
-                </a:solidFill>
-                <a:latin typeface="Arial"/>
+                  <a:srgbClr val="1C1C1C"/>
+                </a:solidFill>
+                <a:latin typeface="Trebuchet MS"/>
               </a:rPr>
               <a:t>Teach the Teachers</a:t>
             </a:r>
@@ -10009,9 +10009,9 @@
             <a:r>
               <a:rPr sz="3800" b="1">
                 <a:solidFill>
-                  <a:srgbClr val="1F4D2B"/>
-                </a:solidFill>
-                <a:latin typeface="Georgia"/>
+                  <a:srgbClr val="1C1C1C"/>
+                </a:solidFill>
+                <a:latin typeface="Segoe Print"/>
               </a:rPr>
               <a:t>Three questions</a:t>
             </a:r>
@@ -10033,7 +10033,7 @@
             <a:avLst/>
           </a:prstGeom>
           <a:solidFill>
-            <a:srgbClr val="E2D8C4"/>
+            <a:srgbClr val="2C6FB7"/>
           </a:solidFill>
           <a:ln>
             <a:noFill/>
@@ -10092,9 +10092,9 @@
             <a:r>
               <a:rPr sz="2800" b="0">
                 <a:solidFill>
-                  <a:srgbClr val="20190F"/>
-                </a:solidFill>
-                <a:latin typeface="Arial"/>
+                  <a:srgbClr val="1C1C1C"/>
+                </a:solidFill>
+                <a:latin typeface="Trebuchet MS"/>
               </a:rPr>
               <a:t>•  Is soil alive?</a:t>
             </a:r>
@@ -10108,9 +10108,9 @@
             <a:r>
               <a:rPr sz="2800" b="0">
                 <a:solidFill>
-                  <a:srgbClr val="20190F"/>
-                </a:solidFill>
-                <a:latin typeface="Arial"/>
+                  <a:srgbClr val="1C1C1C"/>
+                </a:solidFill>
+                <a:latin typeface="Trebuchet MS"/>
               </a:rPr>
               <a:t>•  What lives in soil?</a:t>
             </a:r>
@@ -10124,9 +10124,9 @@
             <a:r>
               <a:rPr sz="2800" b="0">
                 <a:solidFill>
-                  <a:srgbClr val="20190F"/>
-                </a:solidFill>
-                <a:latin typeface="Arial"/>
+                  <a:srgbClr val="1C1C1C"/>
+                </a:solidFill>
+                <a:latin typeface="Trebuchet MS"/>
               </a:rPr>
               <a:t>•  How could you find out?</a:t>
             </a:r>
@@ -10172,7 +10172,7 @@
             <a:avLst/>
           </a:prstGeom>
           <a:solidFill>
-            <a:srgbClr val="20190F"/>
+            <a:srgbClr val="1C1C1C"/>
           </a:solidFill>
           <a:ln>
             <a:noFill/>
@@ -10231,9 +10231,9 @@
             <a:r>
               <a:rPr sz="1100" b="0">
                 <a:solidFill>
-                  <a:srgbClr val="F7F2E9"/>
-                </a:solidFill>
-                <a:latin typeface="Arial"/>
+                  <a:srgbClr val="C9A77C"/>
+                </a:solidFill>
+                <a:latin typeface="Trebuchet MS"/>
               </a:rPr>
               <a:t>▶  Clip T-ANI-17 · play from the tablet: watch-05-living-soil.mp4</a:t>
             </a:r>
@@ -10254,7 +10254,7 @@
     <p:bg>
       <p:bgPr>
         <a:solidFill>
-          <a:srgbClr val="F7F2E9"/>
+          <a:srgbClr val="C9A77C"/>
         </a:solidFill>
         <a:effectLst/>
       </p:bgPr>
@@ -10296,9 +10296,9 @@
             <a:r>
               <a:rPr sz="1000" b="0">
                 <a:solidFill>
-                  <a:srgbClr val="6B6255"/>
-                </a:solidFill>
-                <a:latin typeface="Arial"/>
+                  <a:srgbClr val="1C1C1C"/>
+                </a:solidFill>
+                <a:latin typeface="Trebuchet MS"/>
               </a:rPr>
               <a:t>T-D2-06   ·   Poster T-P08</a:t>
             </a:r>
@@ -10335,9 +10335,9 @@
             <a:r>
               <a:rPr sz="1000" b="0">
                 <a:solidFill>
-                  <a:srgbClr val="6B6255"/>
-                </a:solidFill>
-                <a:latin typeface="Arial"/>
+                  <a:srgbClr val="1C1C1C"/>
+                </a:solidFill>
+                <a:latin typeface="Trebuchet MS"/>
               </a:rPr>
               <a:t>Teach the Teachers</a:t>
             </a:r>
@@ -10374,9 +10374,9 @@
             <a:r>
               <a:rPr sz="3800" b="1">
                 <a:solidFill>
-                  <a:srgbClr val="1F4D2B"/>
-                </a:solidFill>
-                <a:latin typeface="Georgia"/>
+                  <a:srgbClr val="1C1C1C"/>
+                </a:solidFill>
+                <a:latin typeface="Segoe Print"/>
               </a:rPr>
               <a:t>Climb the question ladder</a:t>
             </a:r>
@@ -10398,7 +10398,7 @@
             <a:avLst/>
           </a:prstGeom>
           <a:solidFill>
-            <a:srgbClr val="E2D8C4"/>
+            <a:srgbClr val="2C6FB7"/>
           </a:solidFill>
           <a:ln>
             <a:noFill/>
@@ -10457,9 +10457,9 @@
             <a:r>
               <a:rPr sz="2800" b="0">
                 <a:solidFill>
-                  <a:srgbClr val="20190F"/>
-                </a:solidFill>
-                <a:latin typeface="Arial"/>
+                  <a:srgbClr val="1C1C1C"/>
+                </a:solidFill>
+                <a:latin typeface="Trebuchet MS"/>
               </a:rPr>
               <a:t>•  Closed · Open · Deeper</a:t>
             </a:r>
@@ -10473,9 +10473,9 @@
             <a:r>
               <a:rPr sz="2800" b="0">
                 <a:solidFill>
-                  <a:srgbClr val="20190F"/>
-                </a:solidFill>
-                <a:latin typeface="Arial"/>
+                  <a:srgbClr val="1C1C1C"/>
+                </a:solidFill>
+                <a:latin typeface="Trebuchet MS"/>
               </a:rPr>
               <a:t>•  Wait 5 seconds</a:t>
             </a:r>
@@ -10489,9 +10489,9 @@
             <a:r>
               <a:rPr sz="2800" b="0">
                 <a:solidFill>
-                  <a:srgbClr val="20190F"/>
-                </a:solidFill>
-                <a:latin typeface="Arial"/>
+                  <a:srgbClr val="1C1C1C"/>
+                </a:solidFill>
+                <a:latin typeface="Trebuchet MS"/>
               </a:rPr>
               <a:t>•  Bounce it back</a:t>
             </a:r>
@@ -10513,11 +10513,11 @@
             <a:avLst/>
           </a:prstGeom>
           <a:solidFill>
-            <a:srgbClr val="FBF6EC"/>
+            <a:srgbClr val="C9A77C"/>
           </a:solidFill>
           <a:ln w="15875">
             <a:solidFill>
-              <a:srgbClr val="E2D8C4"/>
+              <a:srgbClr val="2C6FB7"/>
             </a:solidFill>
           </a:ln>
           <a:effectLst/>
@@ -10574,9 +10574,9 @@
             <a:r>
               <a:rPr sz="1200" b="1">
                 <a:solidFill>
-                  <a:srgbClr val="C07A1E"/>
-                </a:solidFill>
-                <a:latin typeface="Arial"/>
+                  <a:srgbClr val="D2452C"/>
+                </a:solidFill>
+                <a:latin typeface="Trebuchet MS"/>
               </a:rPr>
               <a:t>POSTER ART · T-P08-ART · coming</a:t>
             </a:r>
@@ -10613,9 +10613,9 @@
             <a:r>
               <a:rPr sz="1800" b="1">
                 <a:solidFill>
-                  <a:srgbClr val="1F4D2B"/>
-                </a:solidFill>
-                <a:latin typeface="Georgia"/>
+                  <a:srgbClr val="1C1C1C"/>
+                </a:solidFill>
+                <a:latin typeface="Segoe Print"/>
               </a:rPr>
               <a:t>Artwork for T-P08 · The question ladder</a:t>
             </a:r>
@@ -10652,9 +10652,9 @@
             <a:r>
               <a:rPr sz="1100" b="0">
                 <a:solidFill>
-                  <a:srgbClr val="20190F"/>
-                </a:solidFill>
-                <a:latin typeface="Arial"/>
+                  <a:srgbClr val="1C1C1C"/>
+                </a:solidFill>
+                <a:latin typeface="Trebuchet MS"/>
               </a:rPr>
               <a:t>A tall wooden ladder with three rungs leans against a tree. On the bottom rung, a small figure beside one short speech-bubble shape (empty). On the middle rung, two figures with several branching bubble shapes. On the top rung, a figure looks out over a whole garden, hand on chin, with a bubble shaped like a sprouting seed. At the ladder's foot: an open…</a:t>
             </a:r>
@@ -10675,7 +10675,7 @@
     <p:bg>
       <p:bgPr>
         <a:solidFill>
-          <a:srgbClr val="F7F2E9"/>
+          <a:srgbClr val="C9A77C"/>
         </a:solidFill>
         <a:effectLst/>
       </p:bgPr>
@@ -10717,9 +10717,9 @@
             <a:r>
               <a:rPr sz="1000" b="0">
                 <a:solidFill>
-                  <a:srgbClr val="6B6255"/>
-                </a:solidFill>
-                <a:latin typeface="Arial"/>
+                  <a:srgbClr val="1C1C1C"/>
+                </a:solidFill>
+                <a:latin typeface="Trebuchet MS"/>
               </a:rPr>
               <a:t>T-D2-07   ·   Poster T-P08</a:t>
             </a:r>
@@ -10756,9 +10756,9 @@
             <a:r>
               <a:rPr sz="1000" b="0">
                 <a:solidFill>
-                  <a:srgbClr val="6B6255"/>
-                </a:solidFill>
-                <a:latin typeface="Arial"/>
+                  <a:srgbClr val="1C1C1C"/>
+                </a:solidFill>
+                <a:latin typeface="Trebuchet MS"/>
               </a:rPr>
               <a:t>Teach the Teachers</a:t>
             </a:r>
@@ -10780,7 +10780,7 @@
             <a:avLst/>
           </a:prstGeom>
           <a:solidFill>
-            <a:srgbClr val="C07A1E"/>
+            <a:srgbClr val="D2452C"/>
           </a:solidFill>
           <a:ln>
             <a:noFill/>
@@ -10839,9 +10839,9 @@
             <a:r>
               <a:rPr sz="1400" b="1">
                 <a:solidFill>
-                  <a:srgbClr val="F7F2E9"/>
-                </a:solidFill>
-                <a:latin typeface="Arial"/>
+                  <a:srgbClr val="C9A77C"/>
+                </a:solidFill>
+                <a:latin typeface="Trebuchet MS"/>
               </a:rPr>
               <a:t>YOUR TURN</a:t>
             </a:r>
@@ -10878,9 +10878,9 @@
             <a:r>
               <a:rPr sz="3800" b="1">
                 <a:solidFill>
-                  <a:srgbClr val="1F4D2B"/>
-                </a:solidFill>
-                <a:latin typeface="Georgia"/>
+                  <a:srgbClr val="1C1C1C"/>
+                </a:solidFill>
+                <a:latin typeface="Segoe Print"/>
               </a:rPr>
               <a:t>Wait and bounce</a:t>
             </a:r>
@@ -10902,7 +10902,7 @@
             <a:avLst/>
           </a:prstGeom>
           <a:solidFill>
-            <a:srgbClr val="E2D8C4"/>
+            <a:srgbClr val="2C6FB7"/>
           </a:solidFill>
           <a:ln>
             <a:noFill/>
@@ -10961,9 +10961,9 @@
             <a:r>
               <a:rPr sz="3000" b="1">
                 <a:solidFill>
-                  <a:srgbClr val="20190F"/>
-                </a:solidFill>
-                <a:latin typeface="Arial"/>
+                  <a:srgbClr val="1C1C1C"/>
+                </a:solidFill>
+                <a:latin typeface="Trebuchet MS"/>
               </a:rPr>
               <a:t>•  Count five fingers silently</a:t>
             </a:r>
@@ -10977,9 +10977,9 @@
             <a:r>
               <a:rPr sz="3000" b="1">
                 <a:solidFill>
-                  <a:srgbClr val="20190F"/>
-                </a:solidFill>
-                <a:latin typeface="Arial"/>
+                  <a:srgbClr val="1C1C1C"/>
+                </a:solidFill>
+                <a:latin typeface="Trebuchet MS"/>
               </a:rPr>
               <a:t>•  Don't answer — bounce it back</a:t>
             </a:r>
@@ -10993,9 +10993,9 @@
             <a:r>
               <a:rPr sz="3000" b="1">
                 <a:solidFill>
-                  <a:srgbClr val="20190F"/>
-                </a:solidFill>
-                <a:latin typeface="Arial"/>
+                  <a:srgbClr val="1C1C1C"/>
+                </a:solidFill>
+                <a:latin typeface="Trebuchet MS"/>
               </a:rPr>
               <a:t>•  12 minutes</a:t>
             </a:r>
@@ -11017,11 +11017,11 @@
             <a:avLst/>
           </a:prstGeom>
           <a:solidFill>
-            <a:srgbClr val="FBF6EC"/>
+            <a:srgbClr val="C9A77C"/>
           </a:solidFill>
           <a:ln w="15875">
             <a:solidFill>
-              <a:srgbClr val="E2D8C4"/>
+              <a:srgbClr val="2C6FB7"/>
             </a:solidFill>
           </a:ln>
           <a:effectLst/>
@@ -11078,9 +11078,9 @@
             <a:r>
               <a:rPr sz="1200" b="1">
                 <a:solidFill>
-                  <a:srgbClr val="C07A1E"/>
-                </a:solidFill>
-                <a:latin typeface="Arial"/>
+                  <a:srgbClr val="D2452C"/>
+                </a:solidFill>
+                <a:latin typeface="Trebuchet MS"/>
               </a:rPr>
               <a:t>POSTER ART · T-P08-ART · coming</a:t>
             </a:r>
@@ -11117,9 +11117,9 @@
             <a:r>
               <a:rPr sz="1800" b="1">
                 <a:solidFill>
-                  <a:srgbClr val="1F4D2B"/>
-                </a:solidFill>
-                <a:latin typeface="Georgia"/>
+                  <a:srgbClr val="1C1C1C"/>
+                </a:solidFill>
+                <a:latin typeface="Segoe Print"/>
               </a:rPr>
               <a:t>Artwork for T-P08 · The question ladder</a:t>
             </a:r>
@@ -11156,9 +11156,9 @@
             <a:r>
               <a:rPr sz="1100" b="0">
                 <a:solidFill>
-                  <a:srgbClr val="20190F"/>
-                </a:solidFill>
-                <a:latin typeface="Arial"/>
+                  <a:srgbClr val="1C1C1C"/>
+                </a:solidFill>
+                <a:latin typeface="Trebuchet MS"/>
               </a:rPr>
               <a:t>A tall wooden ladder with three rungs leans against a tree. On the bottom rung, a small figure beside one short speech-bubble shape (empty). On the middle rung, two figures with several branching bubble shapes. On the top rung, a figure looks out over a whole garden, hand on chin, with a bubble shaped like a sprouting seed. At the ladder's foot: an open…</a:t>
             </a:r>
@@ -11179,7 +11179,7 @@
     <p:bg>
       <p:bgPr>
         <a:solidFill>
-          <a:srgbClr val="1F4D2B"/>
+          <a:srgbClr val="2F3A33"/>
         </a:solidFill>
         <a:effectLst/>
       </p:bgPr>
@@ -11221,9 +11221,9 @@
             <a:r>
               <a:rPr sz="1000" b="0">
                 <a:solidFill>
-                  <a:srgbClr val="A8D88A"/>
-                </a:solidFill>
-                <a:latin typeface="Arial"/>
+                  <a:srgbClr val="F2EFE6"/>
+                </a:solidFill>
+                <a:latin typeface="Trebuchet MS"/>
               </a:rPr>
               <a:t>T-D2-08   ·   Poster F-P05</a:t>
             </a:r>
@@ -11260,9 +11260,9 @@
             <a:r>
               <a:rPr sz="1000" b="0">
                 <a:solidFill>
-                  <a:srgbClr val="A8D88A"/>
-                </a:solidFill>
-                <a:latin typeface="Arial"/>
+                  <a:srgbClr val="F2EFE6"/>
+                </a:solidFill>
+                <a:latin typeface="Trebuchet MS"/>
               </a:rPr>
               <a:t>Teach the Teachers</a:t>
             </a:r>
@@ -11299,9 +11299,9 @@
             <a:r>
               <a:rPr sz="4800" b="1">
                 <a:solidFill>
-                  <a:srgbClr val="F7F2E9"/>
-                </a:solidFill>
-                <a:latin typeface="Georgia"/>
+                  <a:srgbClr val="F2EFE6"/>
+                </a:solidFill>
+                <a:latin typeface="Segoe Print"/>
               </a:rPr>
               <a:t>Model lesson under a tree</a:t>
             </a:r>
@@ -11323,7 +11323,7 @@
             <a:avLst/>
           </a:prstGeom>
           <a:solidFill>
-            <a:srgbClr val="C07A1E"/>
+            <a:srgbClr val="D2452C"/>
           </a:solidFill>
           <a:ln>
             <a:noFill/>
@@ -11382,9 +11382,9 @@
             <a:r>
               <a:rPr sz="2400" b="0">
                 <a:solidFill>
-                  <a:srgbClr val="A8D88A"/>
-                </a:solidFill>
-                <a:latin typeface="Arial"/>
+                  <a:srgbClr val="F2EFE6"/>
+                </a:solidFill>
+                <a:latin typeface="Trebuchet MS"/>
               </a:rPr>
               <a:t>Read the land and water</a:t>
             </a:r>
@@ -11398,9 +11398,9 @@
             <a:r>
               <a:rPr sz="2400" b="0">
                 <a:solidFill>
-                  <a:srgbClr val="A8D88A"/>
-                </a:solidFill>
-                <a:latin typeface="Arial"/>
+                  <a:srgbClr val="F2EFE6"/>
+                </a:solidFill>
+                <a:latin typeface="Trebuchet MS"/>
               </a:rPr>
               <a:t>Recorders: count question types</a:t>
             </a:r>
@@ -11422,11 +11422,11 @@
             <a:avLst/>
           </a:prstGeom>
           <a:solidFill>
-            <a:srgbClr val="FBF6EC"/>
+            <a:srgbClr val="C9A77C"/>
           </a:solidFill>
           <a:ln w="15875">
             <a:solidFill>
-              <a:srgbClr val="E2D8C4"/>
+              <a:srgbClr val="2C6FB7"/>
             </a:solidFill>
           </a:ln>
           <a:effectLst/>
@@ -11483,9 +11483,9 @@
             <a:r>
               <a:rPr sz="1200" b="1">
                 <a:solidFill>
-                  <a:srgbClr val="C07A1E"/>
-                </a:solidFill>
-                <a:latin typeface="Arial"/>
+                  <a:srgbClr val="D2452C"/>
+                </a:solidFill>
+                <a:latin typeface="Trebuchet MS"/>
               </a:rPr>
               <a:t>IMAGE · T-IMG-08 · coming</a:t>
             </a:r>
@@ -11522,9 +11522,9 @@
             <a:r>
               <a:rPr sz="1800" b="1">
                 <a:solidFill>
-                  <a:srgbClr val="1F4D2B"/>
-                </a:solidFill>
-                <a:latin typeface="Georgia"/>
+                  <a:srgbClr val="1C1C1C"/>
+                </a:solidFill>
+                <a:latin typeface="Segoe Print"/>
               </a:rPr>
               <a:t>Tree talk</a:t>
             </a:r>
@@ -11561,9 +11561,9 @@
             <a:r>
               <a:rPr sz="1100" b="0">
                 <a:solidFill>
-                  <a:srgbClr val="20190F"/>
-                </a:solidFill>
-                <a:latin typeface="Arial"/>
+                  <a:srgbClr val="1C1C1C"/>
+                </a:solidFill>
+                <a:latin typeface="Trebuchet MS"/>
               </a:rPr>
               <a:t>A teaching circle under a big shade tree: a poster tied to the trunk at seated eye level; about twelve learners in a horseshoe on chairs and a log, faces in shade, the sun behind them in the upper part of the scene (north). The facilitator stands to one side of the poster. On the ground in the middle: two cut-open 2 ℓ bottles and a cardboard house. A…</a:t>
             </a:r>
@@ -11584,7 +11584,7 @@
     <p:bg>
       <p:bgPr>
         <a:solidFill>
-          <a:srgbClr val="F7F2E9"/>
+          <a:srgbClr val="C9A77C"/>
         </a:solidFill>
         <a:effectLst/>
       </p:bgPr>
@@ -11626,9 +11626,9 @@
             <a:r>
               <a:rPr sz="1000" b="0">
                 <a:solidFill>
-                  <a:srgbClr val="6B6255"/>
-                </a:solidFill>
-                <a:latin typeface="Arial"/>
+                  <a:srgbClr val="1C1C1C"/>
+                </a:solidFill>
+                <a:latin typeface="Trebuchet MS"/>
               </a:rPr>
               <a:t>T-D2-09   ·   Poster F-P05</a:t>
             </a:r>
@@ -11665,9 +11665,9 @@
             <a:r>
               <a:rPr sz="1000" b="0">
                 <a:solidFill>
-                  <a:srgbClr val="6B6255"/>
-                </a:solidFill>
-                <a:latin typeface="Arial"/>
+                  <a:srgbClr val="1C1C1C"/>
+                </a:solidFill>
+                <a:latin typeface="Trebuchet MS"/>
               </a:rPr>
               <a:t>Teach the Teachers</a:t>
             </a:r>
@@ -11689,7 +11689,7 @@
             <a:avLst/>
           </a:prstGeom>
           <a:solidFill>
-            <a:srgbClr val="C07A1E"/>
+            <a:srgbClr val="D2452C"/>
           </a:solidFill>
           <a:ln>
             <a:noFill/>
@@ -11748,9 +11748,9 @@
             <a:r>
               <a:rPr sz="1400" b="1">
                 <a:solidFill>
-                  <a:srgbClr val="F7F2E9"/>
-                </a:solidFill>
-                <a:latin typeface="Arial"/>
+                  <a:srgbClr val="C9A77C"/>
+                </a:solidFill>
+                <a:latin typeface="Trebuchet MS"/>
               </a:rPr>
               <a:t>YOUR TURN</a:t>
             </a:r>
@@ -11787,9 +11787,9 @@
             <a:r>
               <a:rPr sz="3800" b="1">
                 <a:solidFill>
-                  <a:srgbClr val="1F4D2B"/>
-                </a:solidFill>
-                <a:latin typeface="Georgia"/>
+                  <a:srgbClr val="1C1C1C"/>
+                </a:solidFill>
+                <a:latin typeface="Segoe Print"/>
               </a:rPr>
               <a:t>Where is the sun?</a:t>
             </a:r>
@@ -11811,7 +11811,7 @@
             <a:avLst/>
           </a:prstGeom>
           <a:solidFill>
-            <a:srgbClr val="E2D8C4"/>
+            <a:srgbClr val="2C6FB7"/>
           </a:solidFill>
           <a:ln>
             <a:noFill/>
@@ -11870,9 +11870,9 @@
             <a:r>
               <a:rPr sz="2600" b="1">
                 <a:solidFill>
-                  <a:srgbClr val="20190F"/>
-                </a:solidFill>
-                <a:latin typeface="Arial"/>
+                  <a:srgbClr val="1C1C1C"/>
+                </a:solidFill>
+                <a:latin typeface="Trebuchet MS"/>
               </a:rPr>
               <a:t>•  Window faces north</a:t>
             </a:r>
@@ -11886,9 +11886,9 @@
             <a:r>
               <a:rPr sz="2600" b="1">
                 <a:solidFill>
-                  <a:srgbClr val="20190F"/>
-                </a:solidFill>
-                <a:latin typeface="Arial"/>
+                  <a:srgbClr val="1C1C1C"/>
+                </a:solidFill>
+                <a:latin typeface="Trebuchet MS"/>
               </a:rPr>
               <a:t>•  Mark winter shade with sticks</a:t>
             </a:r>
@@ -11902,9 +11902,9 @@
             <a:r>
               <a:rPr sz="2600" b="1">
                 <a:solidFill>
-                  <a:srgbClr val="20190F"/>
-                </a:solidFill>
-                <a:latin typeface="Arial"/>
+                  <a:srgbClr val="1C1C1C"/>
+                </a:solidFill>
+                <a:latin typeface="Trebuchet MS"/>
               </a:rPr>
               <a:t>•  Which way does the shadow point?</a:t>
             </a:r>
@@ -11926,11 +11926,11 @@
             <a:avLst/>
           </a:prstGeom>
           <a:solidFill>
-            <a:srgbClr val="FBF6EC"/>
+            <a:srgbClr val="C9A77C"/>
           </a:solidFill>
           <a:ln w="15875">
             <a:solidFill>
-              <a:srgbClr val="E2D8C4"/>
+              <a:srgbClr val="2C6FB7"/>
             </a:solidFill>
           </a:ln>
           <a:effectLst/>
@@ -11987,9 +11987,9 @@
             <a:r>
               <a:rPr sz="1200" b="1">
                 <a:solidFill>
-                  <a:srgbClr val="C07A1E"/>
-                </a:solidFill>
-                <a:latin typeface="Arial"/>
+                  <a:srgbClr val="D2452C"/>
+                </a:solidFill>
+                <a:latin typeface="Trebuchet MS"/>
               </a:rPr>
               <a:t>IMAGE · T-IMG-07 · coming</a:t>
             </a:r>
@@ -12026,9 +12026,9 @@
             <a:r>
               <a:rPr sz="1800" b="1">
                 <a:solidFill>
-                  <a:srgbClr val="1F4D2B"/>
-                </a:solidFill>
-                <a:latin typeface="Georgia"/>
+                  <a:srgbClr val="1C1C1C"/>
+                </a:solidFill>
+                <a:latin typeface="Segoe Print"/>
               </a:rPr>
               <a:t>The cardboard house and the sun</a:t>
             </a:r>
@@ -12065,9 +12065,9 @@
             <a:r>
               <a:rPr sz="1100" b="0">
                 <a:solidFill>
-                  <a:srgbClr val="20190F"/>
-                </a:solidFill>
-                <a:latin typeface="Arial"/>
+                  <a:srgbClr val="1C1C1C"/>
+                </a:solidFill>
+                <a:latin typeface="Trebuchet MS"/>
               </a:rPr>
               <a:t>Close view on bare ground: a shoebox house with a card triangle roof and small windows on each side, sitting on a patch of soil. A compass arrow drawn on the ground points up-screen (north). Sunlight comes from the north (upper part), low (winter), casting a long shadow of the house down-screen (south). Small sticks mark the edge of the shadow. Two hands…</a:t>
             </a:r>

--- a/courses/build/teach-the-teachers/T-D2.pptx
+++ b/courses/build/teach-the-teachers/T-D2.pptx
@@ -615,7 +615,7 @@
           </a:p>
           <a:p>
             <a:r>
-              <a:t>Clip T-ANI-14: public/course-animations/reading-landscape/watch-05-water-movement.mp4</a:t>
+              <a:t>Clip T-ANI-14: public/course-media/teach-the-teachers/T-ANI-14.mp4</a:t>
             </a:r>
           </a:p>
         </p:txBody>
@@ -1481,7 +1481,7 @@
           </a:p>
           <a:p>
             <a:r>
-              <a:t>Clip T-ANI-17: public/course-animations/soil-health/watch-05-living-soil.mp4</a:t>
+              <a:t>Clip T-ANI-17: public/course-media/teach-the-teachers/T-ANI-17.mp4</a:t>
             </a:r>
           </a:p>
         </p:txBody>
@@ -1805,7 +1805,7 @@
           </a:p>
           <a:p>
             <a:r>
-              <a:t>Clip T-ANI-13: public/course-animations/reading-landscape/watch-09-sun-shadows.mp4</a:t>
+              <a:t>Clip T-ANI-13: public/course-media/teach-the-teachers/T-ANI-13.mp4</a:t>
             </a:r>
           </a:p>
         </p:txBody>
@@ -5539,49 +5539,27 @@
           </a:p>
         </p:txBody>
       </p:sp>
-      <p:pic>
-        <p:nvPicPr>
-          <p:cNvPr id="9" name="Picture 8" descr="watch-05-water-movement.jpg"/>
-          <p:cNvPicPr>
-            <a:picLocks noChangeAspect="1"/>
-          </p:cNvPicPr>
-          <p:nvPr/>
-        </p:nvPicPr>
-        <p:blipFill>
-          <a:blip r:embed="rId2"/>
-          <a:stretch>
-            <a:fillRect/>
-          </a:stretch>
-        </p:blipFill>
-        <p:spPr>
-          <a:xfrm>
-            <a:off x="5852160" y="2514600"/>
-            <a:ext cx="5852160" cy="3291840"/>
-          </a:xfrm>
-          <a:prstGeom prst="rect">
-            <a:avLst/>
-          </a:prstGeom>
-        </p:spPr>
-      </p:pic>
-      <p:sp>
-        <p:nvSpPr>
-          <p:cNvPr id="10" name="Rectangle 9"/>
+      <p:sp>
+        <p:nvSpPr>
+          <p:cNvPr id="9" name="Rectangle 8"/>
           <p:cNvSpPr/>
           <p:nvPr/>
         </p:nvSpPr>
         <p:spPr>
           <a:xfrm>
-            <a:off x="5852160" y="5806440"/>
-            <a:ext cx="5852160" cy="411480"/>
+            <a:off x="5852160" y="2103120"/>
+            <a:ext cx="5852160" cy="4114800"/>
           </a:xfrm>
           <a:prstGeom prst="rect">
             <a:avLst/>
           </a:prstGeom>
           <a:solidFill>
-            <a:srgbClr val="1C1C1C"/>
+            <a:srgbClr val="C9A77C"/>
           </a:solidFill>
-          <a:ln>
-            <a:noFill/>
+          <a:ln w="15875">
+            <a:solidFill>
+              <a:srgbClr val="2C6FB7"/>
+            </a:solidFill>
           </a:ln>
           <a:effectLst/>
         </p:spPr>
@@ -5609,14 +5587,53 @@
       </p:sp>
       <p:sp>
         <p:nvSpPr>
+          <p:cNvPr id="10" name="TextBox 9"/>
+          <p:cNvSpPr txBox="1"/>
+          <p:nvPr/>
+        </p:nvSpPr>
+        <p:spPr>
+          <a:xfrm>
+            <a:off x="6080760" y="2286000"/>
+            <a:ext cx="5394960" cy="365760"/>
+          </a:xfrm>
+          <a:prstGeom prst="rect">
+            <a:avLst/>
+          </a:prstGeom>
+          <a:noFill/>
+        </p:spPr>
+        <p:txBody>
+          <a:bodyPr wrap="square" anchor="t" lIns="45720" rIns="45720">
+            <a:spAutoFit/>
+          </a:bodyPr>
+          <a:lstStyle/>
+          <a:p>
+            <a:pPr algn="l">
+              <a:spcAft>
+                <a:spcPts val="800"/>
+              </a:spcAft>
+            </a:pPr>
+            <a:r>
+              <a:rPr sz="1200" b="1">
+                <a:solidFill>
+                  <a:srgbClr val="D2452C"/>
+                </a:solidFill>
+                <a:latin typeface="Trebuchet MS"/>
+              </a:rPr>
+              <a:t>ANIMATION · T-ANI-14 · coming</a:t>
+            </a:r>
+          </a:p>
+        </p:txBody>
+      </p:sp>
+      <p:sp>
+        <p:nvSpPr>
           <p:cNvPr id="11" name="TextBox 10"/>
           <p:cNvSpPr txBox="1"/>
           <p:nvPr/>
         </p:nvSpPr>
         <p:spPr>
           <a:xfrm>
-            <a:off x="5943600" y="5815584"/>
-            <a:ext cx="5669280" cy="384048"/>
+            <a:off x="6080760" y="2670048"/>
+            <a:ext cx="5394960" cy="457200"/>
           </a:xfrm>
           <a:prstGeom prst="rect">
             <a:avLst/>
@@ -5624,7 +5641,7 @@
           <a:noFill/>
         </p:spPr>
         <p:txBody>
-          <a:bodyPr wrap="square" anchor="ctr" lIns="45720" rIns="45720">
+          <a:bodyPr wrap="square" anchor="t" lIns="45720" rIns="45720">
             <a:spAutoFit/>
           </a:bodyPr>
           <a:lstStyle/>
@@ -5635,13 +5652,52 @@
               </a:spcAft>
             </a:pPr>
             <a:r>
+              <a:rPr sz="1800" b="1">
+                <a:solidFill>
+                  <a:srgbClr val="1C1C1C"/>
+                </a:solidFill>
+                <a:latin typeface="Segoe Print"/>
+              </a:rPr>
+              <a:t>Water movement</a:t>
+            </a:r>
+          </a:p>
+        </p:txBody>
+      </p:sp>
+      <p:sp>
+        <p:nvSpPr>
+          <p:cNvPr id="12" name="TextBox 11"/>
+          <p:cNvSpPr txBox="1"/>
+          <p:nvPr/>
+        </p:nvSpPr>
+        <p:spPr>
+          <a:xfrm>
+            <a:off x="6080760" y="3200400"/>
+            <a:ext cx="5394960" cy="2834640"/>
+          </a:xfrm>
+          <a:prstGeom prst="rect">
+            <a:avLst/>
+          </a:prstGeom>
+          <a:noFill/>
+        </p:spPr>
+        <p:txBody>
+          <a:bodyPr wrap="square" anchor="t" lIns="45720" rIns="45720">
+            <a:spAutoFit/>
+          </a:bodyPr>
+          <a:lstStyle/>
+          <a:p>
+            <a:pPr algn="l">
+              <a:spcAft>
+                <a:spcPts val="800"/>
+              </a:spcAft>
+            </a:pPr>
+            <a:r>
               <a:rPr sz="1100" b="0">
                 <a:solidFill>
-                  <a:srgbClr val="C9A77C"/>
+                  <a:srgbClr val="1C1C1C"/>
                 </a:solidFill>
                 <a:latin typeface="Trebuchet MS"/>
               </a:rPr>
-              <a:t>▶  Clip T-ANI-14 · play from the tablet: watch-05-water-movement.mp4</a:t>
+              <a:t>A homestead on a gentle slope in a summer storm: rain falls on roof, road and yard; blue flow lines gather into channels and run downhill carrying soil. Then the same slope with stone lines and grass strips, where the water spreads and sinks in. (Replaces the withdrawn clip `reading-landscape/watch-05-water-movement.mp4`.)</a:t>
             </a:r>
           </a:p>
         </p:txBody>
@@ -10133,49 +10189,27 @@
           </a:p>
         </p:txBody>
       </p:sp>
-      <p:pic>
-        <p:nvPicPr>
-          <p:cNvPr id="7" name="Picture 6" descr="watch-05-living-soil.jpg"/>
-          <p:cNvPicPr>
-            <a:picLocks noChangeAspect="1"/>
-          </p:cNvPicPr>
-          <p:nvPr/>
-        </p:nvPicPr>
-        <p:blipFill>
-          <a:blip r:embed="rId2"/>
-          <a:stretch>
-            <a:fillRect/>
-          </a:stretch>
-        </p:blipFill>
-        <p:spPr>
-          <a:xfrm>
-            <a:off x="5852160" y="2308860"/>
-            <a:ext cx="5852160" cy="3291840"/>
-          </a:xfrm>
-          <a:prstGeom prst="rect">
-            <a:avLst/>
-          </a:prstGeom>
-        </p:spPr>
-      </p:pic>
-      <p:sp>
-        <p:nvSpPr>
-          <p:cNvPr id="8" name="Rectangle 7"/>
+      <p:sp>
+        <p:nvSpPr>
+          <p:cNvPr id="7" name="Rectangle 6"/>
           <p:cNvSpPr/>
           <p:nvPr/>
         </p:nvSpPr>
         <p:spPr>
           <a:xfrm>
-            <a:off x="5852160" y="5806440"/>
-            <a:ext cx="5852160" cy="411480"/>
+            <a:off x="5852160" y="1691640"/>
+            <a:ext cx="5852160" cy="4526280"/>
           </a:xfrm>
           <a:prstGeom prst="rect">
             <a:avLst/>
           </a:prstGeom>
           <a:solidFill>
-            <a:srgbClr val="1C1C1C"/>
+            <a:srgbClr val="C9A77C"/>
           </a:solidFill>
-          <a:ln>
-            <a:noFill/>
+          <a:ln w="15875">
+            <a:solidFill>
+              <a:srgbClr val="2C6FB7"/>
+            </a:solidFill>
           </a:ln>
           <a:effectLst/>
         </p:spPr>
@@ -10203,14 +10237,53 @@
       </p:sp>
       <p:sp>
         <p:nvSpPr>
+          <p:cNvPr id="8" name="TextBox 7"/>
+          <p:cNvSpPr txBox="1"/>
+          <p:nvPr/>
+        </p:nvSpPr>
+        <p:spPr>
+          <a:xfrm>
+            <a:off x="6080760" y="1874520"/>
+            <a:ext cx="5394960" cy="365760"/>
+          </a:xfrm>
+          <a:prstGeom prst="rect">
+            <a:avLst/>
+          </a:prstGeom>
+          <a:noFill/>
+        </p:spPr>
+        <p:txBody>
+          <a:bodyPr wrap="square" anchor="t" lIns="45720" rIns="45720">
+            <a:spAutoFit/>
+          </a:bodyPr>
+          <a:lstStyle/>
+          <a:p>
+            <a:pPr algn="l">
+              <a:spcAft>
+                <a:spcPts val="800"/>
+              </a:spcAft>
+            </a:pPr>
+            <a:r>
+              <a:rPr sz="1200" b="1">
+                <a:solidFill>
+                  <a:srgbClr val="D2452C"/>
+                </a:solidFill>
+                <a:latin typeface="Trebuchet MS"/>
+              </a:rPr>
+              <a:t>ANIMATION · T-ANI-17 · coming</a:t>
+            </a:r>
+          </a:p>
+        </p:txBody>
+      </p:sp>
+      <p:sp>
+        <p:nvSpPr>
           <p:cNvPr id="9" name="TextBox 8"/>
           <p:cNvSpPr txBox="1"/>
           <p:nvPr/>
         </p:nvSpPr>
         <p:spPr>
           <a:xfrm>
-            <a:off x="5943600" y="5815584"/>
-            <a:ext cx="5669280" cy="384048"/>
+            <a:off x="6080760" y="2258568"/>
+            <a:ext cx="5394960" cy="457200"/>
           </a:xfrm>
           <a:prstGeom prst="rect">
             <a:avLst/>
@@ -10218,7 +10291,7 @@
           <a:noFill/>
         </p:spPr>
         <p:txBody>
-          <a:bodyPr wrap="square" anchor="ctr" lIns="45720" rIns="45720">
+          <a:bodyPr wrap="square" anchor="t" lIns="45720" rIns="45720">
             <a:spAutoFit/>
           </a:bodyPr>
           <a:lstStyle/>
@@ -10229,13 +10302,52 @@
               </a:spcAft>
             </a:pPr>
             <a:r>
+              <a:rPr sz="1800" b="1">
+                <a:solidFill>
+                  <a:srgbClr val="1C1C1C"/>
+                </a:solidFill>
+                <a:latin typeface="Segoe Print"/>
+              </a:rPr>
+              <a:t>Living soil</a:t>
+            </a:r>
+          </a:p>
+        </p:txBody>
+      </p:sp>
+      <p:sp>
+        <p:nvSpPr>
+          <p:cNvPr id="10" name="TextBox 9"/>
+          <p:cNvSpPr txBox="1"/>
+          <p:nvPr/>
+        </p:nvSpPr>
+        <p:spPr>
+          <a:xfrm>
+            <a:off x="6080760" y="2788920"/>
+            <a:ext cx="5394960" cy="3246120"/>
+          </a:xfrm>
+          <a:prstGeom prst="rect">
+            <a:avLst/>
+          </a:prstGeom>
+          <a:noFill/>
+        </p:spPr>
+        <p:txBody>
+          <a:bodyPr wrap="square" anchor="t" lIns="45720" rIns="45720">
+            <a:spAutoFit/>
+          </a:bodyPr>
+          <a:lstStyle/>
+          <a:p>
+            <a:pPr algn="l">
+              <a:spcAft>
+                <a:spcPts val="800"/>
+              </a:spcAft>
+            </a:pPr>
+            <a:r>
               <a:rPr sz="1100" b="0">
                 <a:solidFill>
-                  <a:srgbClr val="C9A77C"/>
+                  <a:srgbClr val="1C1C1C"/>
                 </a:solidFill>
                 <a:latin typeface="Trebuchet MS"/>
               </a:rPr>
-              <a:t>▶  Clip T-ANI-17 · play from the tablet: watch-05-living-soil.mp4</a:t>
+              <a:t>Cut-away of dark garden soil under mulch, magnified: earthworms tunnel, fungus threads link roots, tiny specks of life move, crumbs hold air and water droplets; a fallen leaf above is slowly broken down and pulled into the soil. (Replaces the withdrawn clip `soil-health/watch-05-living-soil.mp4`.)</a:t>
             </a:r>
           </a:p>
         </p:txBody>
